--- a/docs/content/t_tests_2/t_tests_2_lecture.pptx
+++ b/docs/content/t_tests_2/t_tests_2_lecture.pptx
@@ -3358,7 +3358,7 @@
             </a:pPr>
             <a:r>
               <a:rPr/>
-              <a:t>2026-09-04</a:t>
+              <a:t>2026-09-08</a:t>
             </a:r>
           </a:p>
         </p:txBody>

--- a/docs/content/t_tests_2/t_tests_2_lecture.pptx
+++ b/docs/content/t_tests_2/t_tests_2_lecture.pptx
@@ -3588,7 +3588,7 @@
               <a:rPr>
                 <a:latin typeface="Courier"/>
               </a:rPr>
-              <a:t>t-statistic  : 9.733 </a:t>
+              <a:t>t-statistic  : 0.356 </a:t>
             </a:r>
           </a:p>
           <a:p>
@@ -3730,7 +3730,7 @@
               <a:rPr>
                 <a:latin typeface="Courier"/>
               </a:rPr>
-              <a:t>df (Welch)   : 16.83 </a:t>
+              <a:t>df (Welch)   : 42.53 </a:t>
             </a:r>
           </a:p>
           <a:p>
@@ -3872,7 +3872,7 @@
               <a:rPr>
                 <a:latin typeface="Courier"/>
               </a:rPr>
-              <a:t>p-value      : 2.51e-08 </a:t>
+              <a:t>p-value      : 0.724 </a:t>
             </a:r>
           </a:p>
           <a:p>
@@ -3996,6 +3996,98 @@
                 </a:solidFill>
                 <a:latin typeface="Courier"/>
               </a:rPr>
+              <a:t>3</a:t>
+            </a:r>
+            <a:r>
+              <a:rPr>
+                <a:solidFill>
+                  <a:srgbClr val="003B4F"/>
+                </a:solidFill>
+                <a:latin typeface="Courier"/>
+              </a:rPr>
+              <a:t>),</a:t>
+            </a:r>
+            <a:br/>
+            <a:r>
+              <a:rPr>
+                <a:solidFill>
+                  <a:srgbClr val="003B4F"/>
+                </a:solidFill>
+                <a:latin typeface="Courier"/>
+              </a:rPr>
+              <a:t>  </a:t>
+            </a:r>
+            <a:r>
+              <a:rPr>
+                <a:solidFill>
+                  <a:srgbClr val="20794D"/>
+                </a:solidFill>
+                <a:latin typeface="Courier"/>
+              </a:rPr>
+              <a:t>"to"</a:t>
+            </a:r>
+            <a:r>
+              <a:rPr>
+                <a:solidFill>
+                  <a:srgbClr val="003B4F"/>
+                </a:solidFill>
+                <a:latin typeface="Courier"/>
+              </a:rPr>
+              <a:t>,</a:t>
+            </a:r>
+            <a:br/>
+            <a:r>
+              <a:rPr>
+                <a:solidFill>
+                  <a:srgbClr val="003B4F"/>
+                </a:solidFill>
+                <a:latin typeface="Courier"/>
+              </a:rPr>
+              <a:t>  </a:t>
+            </a:r>
+            <a:r>
+              <a:rPr>
+                <a:solidFill>
+                  <a:srgbClr val="4758AB"/>
+                </a:solidFill>
+                <a:latin typeface="Courier"/>
+              </a:rPr>
+              <a:t>round</a:t>
+            </a:r>
+            <a:r>
+              <a:rPr>
+                <a:solidFill>
+                  <a:srgbClr val="003B4F"/>
+                </a:solidFill>
+                <a:latin typeface="Courier"/>
+              </a:rPr>
+              <a:t>(leaf_ttest_model</a:t>
+            </a:r>
+            <a:r>
+              <a:rPr>
+                <a:solidFill>
+                  <a:srgbClr val="5E5E5E"/>
+                </a:solidFill>
+                <a:latin typeface="Courier"/>
+              </a:rPr>
+              <a:t>$</a:t>
+            </a:r>
+            <a:r>
+              <a:rPr>
+                <a:solidFill>
+                  <a:srgbClr val="003B4F"/>
+                </a:solidFill>
+                <a:latin typeface="Courier"/>
+              </a:rPr>
+              <a:t>conf.int[</a:t>
+            </a:r>
+            <a:r>
+              <a:rPr>
+                <a:solidFill>
+                  <a:srgbClr val="AD0000"/>
+                </a:solidFill>
+                <a:latin typeface="Courier"/>
+              </a:rPr>
               <a:t>2</a:t>
             </a:r>
             <a:r>
@@ -4005,6 +4097,24 @@
                 </a:solidFill>
                 <a:latin typeface="Courier"/>
               </a:rPr>
+              <a:t>], </a:t>
+            </a:r>
+            <a:r>
+              <a:rPr>
+                <a:solidFill>
+                  <a:srgbClr val="AD0000"/>
+                </a:solidFill>
+                <a:latin typeface="Courier"/>
+              </a:rPr>
+              <a:t>3</a:t>
+            </a:r>
+            <a:r>
+              <a:rPr>
+                <a:solidFill>
+                  <a:srgbClr val="003B4F"/>
+                </a:solidFill>
+                <a:latin typeface="Courier"/>
+              </a:rPr>
               <a:t>),</a:t>
             </a:r>
             <a:br/>
@@ -4024,16 +4134,25 @@
                 </a:solidFill>
                 <a:latin typeface="Courier"/>
               </a:rPr>
-              <a:t>"to"</a:t>
-            </a:r>
-            <a:r>
-              <a:rPr>
-                <a:solidFill>
-                  <a:srgbClr val="003B4F"/>
-                </a:solidFill>
-                <a:latin typeface="Courier"/>
-              </a:rPr>
-              <a:t>,</a:t>
+              <a:t>"g</a:t>
+            </a:r>
+            <a:r>
+              <a:rPr>
+                <a:solidFill>
+                  <a:srgbClr val="5E5E5E"/>
+                </a:solidFill>
+                <a:latin typeface="Courier"/>
+              </a:rPr>
+              <a:t>\n</a:t>
+            </a:r>
+            <a:r>
+              <a:rPr>
+                <a:solidFill>
+                  <a:srgbClr val="20794D"/>
+                </a:solidFill>
+                <a:latin typeface="Courier"/>
+              </a:rPr>
+              <a:t>"</a:t>
             </a:r>
             <a:br/>
             <a:r>
@@ -4043,8 +4162,24 @@
                 </a:solidFill>
                 <a:latin typeface="Courier"/>
               </a:rPr>
-              <a:t>  </a:t>
-            </a:r>
+              <a:t>)</a:t>
+            </a:r>
+          </a:p>
+          <a:p>
+            <a:pPr lvl="0" indent="0">
+              <a:buNone/>
+            </a:pPr>
+            <a:r>
+              <a:rPr>
+                <a:latin typeface="Courier"/>
+              </a:rPr>
+              <a:t>95% CI       : -0.084 to 0.12 g</a:t>
+            </a:r>
+          </a:p>
+          <a:p>
+            <a:pPr lvl="0" indent="0">
+              <a:buNone/>
+            </a:pPr>
             <a:r>
               <a:rPr>
                 <a:solidFill>
@@ -4052,6 +4187,42 @@
                 </a:solidFill>
                 <a:latin typeface="Courier"/>
               </a:rPr>
+              <a:t>cat</a:t>
+            </a:r>
+            <a:r>
+              <a:rPr>
+                <a:solidFill>
+                  <a:srgbClr val="003B4F"/>
+                </a:solidFill>
+                <a:latin typeface="Courier"/>
+              </a:rPr>
+              <a:t>(</a:t>
+            </a:r>
+            <a:r>
+              <a:rPr>
+                <a:solidFill>
+                  <a:srgbClr val="20794D"/>
+                </a:solidFill>
+                <a:latin typeface="Courier"/>
+              </a:rPr>
+              <a:t>"Mean shady   :"</a:t>
+            </a:r>
+            <a:r>
+              <a:rPr>
+                <a:solidFill>
+                  <a:srgbClr val="003B4F"/>
+                </a:solidFill>
+                <a:latin typeface="Courier"/>
+              </a:rPr>
+              <a:t>, </a:t>
+            </a:r>
+            <a:r>
+              <a:rPr>
+                <a:solidFill>
+                  <a:srgbClr val="4758AB"/>
+                </a:solidFill>
+                <a:latin typeface="Courier"/>
+              </a:rPr>
               <a:t>round</a:t>
             </a:r>
             <a:r>
@@ -4079,7 +4250,7 @@
                 </a:solidFill>
                 <a:latin typeface="Courier"/>
               </a:rPr>
-              <a:t>conf.int[</a:t>
+              <a:t>estimate[</a:t>
             </a:r>
             <a:r>
               <a:rPr>
@@ -4088,6 +4259,166 @@
                 </a:solidFill>
                 <a:latin typeface="Courier"/>
               </a:rPr>
+              <a:t>1</a:t>
+            </a:r>
+            <a:r>
+              <a:rPr>
+                <a:solidFill>
+                  <a:srgbClr val="003B4F"/>
+                </a:solidFill>
+                <a:latin typeface="Courier"/>
+              </a:rPr>
+              <a:t>], </a:t>
+            </a:r>
+            <a:r>
+              <a:rPr>
+                <a:solidFill>
+                  <a:srgbClr val="AD0000"/>
+                </a:solidFill>
+                <a:latin typeface="Courier"/>
+              </a:rPr>
+              <a:t>3</a:t>
+            </a:r>
+            <a:r>
+              <a:rPr>
+                <a:solidFill>
+                  <a:srgbClr val="003B4F"/>
+                </a:solidFill>
+                <a:latin typeface="Courier"/>
+              </a:rPr>
+              <a:t>), </a:t>
+            </a:r>
+            <a:r>
+              <a:rPr>
+                <a:solidFill>
+                  <a:srgbClr val="20794D"/>
+                </a:solidFill>
+                <a:latin typeface="Courier"/>
+              </a:rPr>
+              <a:t>"g</a:t>
+            </a:r>
+            <a:r>
+              <a:rPr>
+                <a:solidFill>
+                  <a:srgbClr val="5E5E5E"/>
+                </a:solidFill>
+                <a:latin typeface="Courier"/>
+              </a:rPr>
+              <a:t>\n</a:t>
+            </a:r>
+            <a:r>
+              <a:rPr>
+                <a:solidFill>
+                  <a:srgbClr val="20794D"/>
+                </a:solidFill>
+                <a:latin typeface="Courier"/>
+              </a:rPr>
+              <a:t>"</a:t>
+            </a:r>
+            <a:r>
+              <a:rPr>
+                <a:solidFill>
+                  <a:srgbClr val="003B4F"/>
+                </a:solidFill>
+                <a:latin typeface="Courier"/>
+              </a:rPr>
+              <a:t>)</a:t>
+            </a:r>
+          </a:p>
+          <a:p>
+            <a:pPr lvl="0" indent="0">
+              <a:buNone/>
+            </a:pPr>
+            <a:r>
+              <a:rPr>
+                <a:latin typeface="Courier"/>
+              </a:rPr>
+              <a:t>Mean shady   : 0.523 g</a:t>
+            </a:r>
+          </a:p>
+          <a:p>
+            <a:pPr lvl="0" indent="0">
+              <a:buNone/>
+            </a:pPr>
+            <a:r>
+              <a:rPr>
+                <a:solidFill>
+                  <a:srgbClr val="4758AB"/>
+                </a:solidFill>
+                <a:latin typeface="Courier"/>
+              </a:rPr>
+              <a:t>cat</a:t>
+            </a:r>
+            <a:r>
+              <a:rPr>
+                <a:solidFill>
+                  <a:srgbClr val="003B4F"/>
+                </a:solidFill>
+                <a:latin typeface="Courier"/>
+              </a:rPr>
+              <a:t>(</a:t>
+            </a:r>
+            <a:r>
+              <a:rPr>
+                <a:solidFill>
+                  <a:srgbClr val="20794D"/>
+                </a:solidFill>
+                <a:latin typeface="Courier"/>
+              </a:rPr>
+              <a:t>"Mean sunny   :"</a:t>
+            </a:r>
+            <a:r>
+              <a:rPr>
+                <a:solidFill>
+                  <a:srgbClr val="003B4F"/>
+                </a:solidFill>
+                <a:latin typeface="Courier"/>
+              </a:rPr>
+              <a:t>, </a:t>
+            </a:r>
+            <a:r>
+              <a:rPr>
+                <a:solidFill>
+                  <a:srgbClr val="4758AB"/>
+                </a:solidFill>
+                <a:latin typeface="Courier"/>
+              </a:rPr>
+              <a:t>round</a:t>
+            </a:r>
+            <a:r>
+              <a:rPr>
+                <a:solidFill>
+                  <a:srgbClr val="003B4F"/>
+                </a:solidFill>
+                <a:latin typeface="Courier"/>
+              </a:rPr>
+              <a:t>(leaf_ttest_model</a:t>
+            </a:r>
+            <a:r>
+              <a:rPr>
+                <a:solidFill>
+                  <a:srgbClr val="5E5E5E"/>
+                </a:solidFill>
+                <a:latin typeface="Courier"/>
+              </a:rPr>
+              <a:t>$</a:t>
+            </a:r>
+            <a:r>
+              <a:rPr>
+                <a:solidFill>
+                  <a:srgbClr val="003B4F"/>
+                </a:solidFill>
+                <a:latin typeface="Courier"/>
+              </a:rPr>
+              <a:t>estimate[</a:t>
+            </a:r>
+            <a:r>
+              <a:rPr>
+                <a:solidFill>
+                  <a:srgbClr val="AD0000"/>
+                </a:solidFill>
+                <a:latin typeface="Courier"/>
+              </a:rPr>
               <a:t>2</a:t>
             </a:r>
             <a:r>
@@ -4106,26 +4437,16 @@
                 </a:solidFill>
                 <a:latin typeface="Courier"/>
               </a:rPr>
-              <a:t>2</a:t>
-            </a:r>
-            <a:r>
-              <a:rPr>
-                <a:solidFill>
-                  <a:srgbClr val="003B4F"/>
-                </a:solidFill>
-                <a:latin typeface="Courier"/>
-              </a:rPr>
-              <a:t>),</a:t>
-            </a:r>
-            <a:br/>
-            <a:r>
-              <a:rPr>
-                <a:solidFill>
-                  <a:srgbClr val="003B4F"/>
-                </a:solidFill>
-                <a:latin typeface="Courier"/>
-              </a:rPr>
-              <a:t>  </a:t>
+              <a:t>3</a:t>
+            </a:r>
+            <a:r>
+              <a:rPr>
+                <a:solidFill>
+                  <a:srgbClr val="003B4F"/>
+                </a:solidFill>
+                <a:latin typeface="Courier"/>
+              </a:rPr>
+              <a:t>), </a:t>
             </a:r>
             <a:r>
               <a:rPr>
@@ -4154,7 +4475,6 @@
               </a:rPr>
               <a:t>"</a:t>
             </a:r>
-            <a:br/>
             <a:r>
               <a:rPr>
                 <a:solidFill>
@@ -4173,327 +4493,7 @@
               <a:rPr>
                 <a:latin typeface="Courier"/>
               </a:rPr>
-              <a:t>95% CI       : 3.13 to 4.87 g</a:t>
-            </a:r>
-          </a:p>
-          <a:p>
-            <a:pPr lvl="0" indent="0">
-              <a:buNone/>
-            </a:pPr>
-            <a:r>
-              <a:rPr>
-                <a:solidFill>
-                  <a:srgbClr val="4758AB"/>
-                </a:solidFill>
-                <a:latin typeface="Courier"/>
-              </a:rPr>
-              <a:t>cat</a:t>
-            </a:r>
-            <a:r>
-              <a:rPr>
-                <a:solidFill>
-                  <a:srgbClr val="003B4F"/>
-                </a:solidFill>
-                <a:latin typeface="Courier"/>
-              </a:rPr>
-              <a:t>(</a:t>
-            </a:r>
-            <a:r>
-              <a:rPr>
-                <a:solidFill>
-                  <a:srgbClr val="20794D"/>
-                </a:solidFill>
-                <a:latin typeface="Courier"/>
-              </a:rPr>
-              <a:t>"Mean shady   :"</a:t>
-            </a:r>
-            <a:r>
-              <a:rPr>
-                <a:solidFill>
-                  <a:srgbClr val="003B4F"/>
-                </a:solidFill>
-                <a:latin typeface="Courier"/>
-              </a:rPr>
-              <a:t>, </a:t>
-            </a:r>
-            <a:r>
-              <a:rPr>
-                <a:solidFill>
-                  <a:srgbClr val="4758AB"/>
-                </a:solidFill>
-                <a:latin typeface="Courier"/>
-              </a:rPr>
-              <a:t>round</a:t>
-            </a:r>
-            <a:r>
-              <a:rPr>
-                <a:solidFill>
-                  <a:srgbClr val="003B4F"/>
-                </a:solidFill>
-                <a:latin typeface="Courier"/>
-              </a:rPr>
-              <a:t>(leaf_ttest_model</a:t>
-            </a:r>
-            <a:r>
-              <a:rPr>
-                <a:solidFill>
-                  <a:srgbClr val="5E5E5E"/>
-                </a:solidFill>
-                <a:latin typeface="Courier"/>
-              </a:rPr>
-              <a:t>$</a:t>
-            </a:r>
-            <a:r>
-              <a:rPr>
-                <a:solidFill>
-                  <a:srgbClr val="003B4F"/>
-                </a:solidFill>
-                <a:latin typeface="Courier"/>
-              </a:rPr>
-              <a:t>estimate[</a:t>
-            </a:r>
-            <a:r>
-              <a:rPr>
-                <a:solidFill>
-                  <a:srgbClr val="AD0000"/>
-                </a:solidFill>
-                <a:latin typeface="Courier"/>
-              </a:rPr>
-              <a:t>1</a:t>
-            </a:r>
-            <a:r>
-              <a:rPr>
-                <a:solidFill>
-                  <a:srgbClr val="003B4F"/>
-                </a:solidFill>
-                <a:latin typeface="Courier"/>
-              </a:rPr>
-              <a:t>], </a:t>
-            </a:r>
-            <a:r>
-              <a:rPr>
-                <a:solidFill>
-                  <a:srgbClr val="AD0000"/>
-                </a:solidFill>
-                <a:latin typeface="Courier"/>
-              </a:rPr>
-              <a:t>2</a:t>
-            </a:r>
-            <a:r>
-              <a:rPr>
-                <a:solidFill>
-                  <a:srgbClr val="003B4F"/>
-                </a:solidFill>
-                <a:latin typeface="Courier"/>
-              </a:rPr>
-              <a:t>), </a:t>
-            </a:r>
-            <a:r>
-              <a:rPr>
-                <a:solidFill>
-                  <a:srgbClr val="20794D"/>
-                </a:solidFill>
-                <a:latin typeface="Courier"/>
-              </a:rPr>
-              <a:t>"g</a:t>
-            </a:r>
-            <a:r>
-              <a:rPr>
-                <a:solidFill>
-                  <a:srgbClr val="5E5E5E"/>
-                </a:solidFill>
-                <a:latin typeface="Courier"/>
-              </a:rPr>
-              <a:t>\n</a:t>
-            </a:r>
-            <a:r>
-              <a:rPr>
-                <a:solidFill>
-                  <a:srgbClr val="20794D"/>
-                </a:solidFill>
-                <a:latin typeface="Courier"/>
-              </a:rPr>
-              <a:t>"</a:t>
-            </a:r>
-            <a:r>
-              <a:rPr>
-                <a:solidFill>
-                  <a:srgbClr val="003B4F"/>
-                </a:solidFill>
-                <a:latin typeface="Courier"/>
-              </a:rPr>
-              <a:t>)</a:t>
-            </a:r>
-          </a:p>
-          <a:p>
-            <a:pPr lvl="0" indent="0">
-              <a:buNone/>
-            </a:pPr>
-            <a:r>
-              <a:rPr>
-                <a:latin typeface="Courier"/>
-              </a:rPr>
-              <a:t>Mean shady   : 7.8 g</a:t>
-            </a:r>
-          </a:p>
-          <a:p>
-            <a:pPr lvl="0" indent="0">
-              <a:buNone/>
-            </a:pPr>
-            <a:r>
-              <a:rPr>
-                <a:solidFill>
-                  <a:srgbClr val="4758AB"/>
-                </a:solidFill>
-                <a:latin typeface="Courier"/>
-              </a:rPr>
-              <a:t>cat</a:t>
-            </a:r>
-            <a:r>
-              <a:rPr>
-                <a:solidFill>
-                  <a:srgbClr val="003B4F"/>
-                </a:solidFill>
-                <a:latin typeface="Courier"/>
-              </a:rPr>
-              <a:t>(</a:t>
-            </a:r>
-            <a:r>
-              <a:rPr>
-                <a:solidFill>
-                  <a:srgbClr val="20794D"/>
-                </a:solidFill>
-                <a:latin typeface="Courier"/>
-              </a:rPr>
-              <a:t>"Mean sunny   :"</a:t>
-            </a:r>
-            <a:r>
-              <a:rPr>
-                <a:solidFill>
-                  <a:srgbClr val="003B4F"/>
-                </a:solidFill>
-                <a:latin typeface="Courier"/>
-              </a:rPr>
-              <a:t>, </a:t>
-            </a:r>
-            <a:r>
-              <a:rPr>
-                <a:solidFill>
-                  <a:srgbClr val="4758AB"/>
-                </a:solidFill>
-                <a:latin typeface="Courier"/>
-              </a:rPr>
-              <a:t>round</a:t>
-            </a:r>
-            <a:r>
-              <a:rPr>
-                <a:solidFill>
-                  <a:srgbClr val="003B4F"/>
-                </a:solidFill>
-                <a:latin typeface="Courier"/>
-              </a:rPr>
-              <a:t>(leaf_ttest_model</a:t>
-            </a:r>
-            <a:r>
-              <a:rPr>
-                <a:solidFill>
-                  <a:srgbClr val="5E5E5E"/>
-                </a:solidFill>
-                <a:latin typeface="Courier"/>
-              </a:rPr>
-              <a:t>$</a:t>
-            </a:r>
-            <a:r>
-              <a:rPr>
-                <a:solidFill>
-                  <a:srgbClr val="003B4F"/>
-                </a:solidFill>
-                <a:latin typeface="Courier"/>
-              </a:rPr>
-              <a:t>estimate[</a:t>
-            </a:r>
-            <a:r>
-              <a:rPr>
-                <a:solidFill>
-                  <a:srgbClr val="AD0000"/>
-                </a:solidFill>
-                <a:latin typeface="Courier"/>
-              </a:rPr>
-              <a:t>2</a:t>
-            </a:r>
-            <a:r>
-              <a:rPr>
-                <a:solidFill>
-                  <a:srgbClr val="003B4F"/>
-                </a:solidFill>
-                <a:latin typeface="Courier"/>
-              </a:rPr>
-              <a:t>], </a:t>
-            </a:r>
-            <a:r>
-              <a:rPr>
-                <a:solidFill>
-                  <a:srgbClr val="AD0000"/>
-                </a:solidFill>
-                <a:latin typeface="Courier"/>
-              </a:rPr>
-              <a:t>2</a:t>
-            </a:r>
-            <a:r>
-              <a:rPr>
-                <a:solidFill>
-                  <a:srgbClr val="003B4F"/>
-                </a:solidFill>
-                <a:latin typeface="Courier"/>
-              </a:rPr>
-              <a:t>), </a:t>
-            </a:r>
-            <a:r>
-              <a:rPr>
-                <a:solidFill>
-                  <a:srgbClr val="20794D"/>
-                </a:solidFill>
-                <a:latin typeface="Courier"/>
-              </a:rPr>
-              <a:t>"g</a:t>
-            </a:r>
-            <a:r>
-              <a:rPr>
-                <a:solidFill>
-                  <a:srgbClr val="5E5E5E"/>
-                </a:solidFill>
-                <a:latin typeface="Courier"/>
-              </a:rPr>
-              <a:t>\n</a:t>
-            </a:r>
-            <a:r>
-              <a:rPr>
-                <a:solidFill>
-                  <a:srgbClr val="20794D"/>
-                </a:solidFill>
-                <a:latin typeface="Courier"/>
-              </a:rPr>
-              <a:t>"</a:t>
-            </a:r>
-            <a:r>
-              <a:rPr>
-                <a:solidFill>
-                  <a:srgbClr val="003B4F"/>
-                </a:solidFill>
-                <a:latin typeface="Courier"/>
-              </a:rPr>
-              <a:t>)</a:t>
-            </a:r>
-          </a:p>
-          <a:p>
-            <a:pPr lvl="0" indent="0">
-              <a:buNone/>
-            </a:pPr>
-            <a:r>
-              <a:rPr>
-                <a:latin typeface="Courier"/>
-              </a:rPr>
-              <a:t>Mean sunny   : 3.8 g</a:t>
+              <a:t>Mean sunny   : 0.505 g</a:t>
             </a:r>
           </a:p>
         </p:txBody>
@@ -4775,15 +4775,23 @@
             </a:pPr>
             <a:r>
               <a:rPr/>
-              <a:t>The </a:t>
+              <a:t>If the </a:t>
             </a:r>
             <a:r>
               <a:rPr b="1"/>
-              <a:t>95% CI</a:t>
+              <a:t>95% CI includes zero</a:t>
             </a:r>
             <a:r>
               <a:rPr/>
-              <a:t> is the range we could expect to see if we repeated this study many times.</a:t>
+              <a:t>, “no difference” is one of the plausible values — consistent with a </a:t>
+            </a:r>
+            <a:r>
+              <a:rPr i="1"/>
+              <a:t>p</a:t>
+            </a:r>
+            <a:r>
+              <a:rPr/>
+              <a:t> above 0.05.</a:t>
             </a:r>
           </a:p>
         </p:txBody>
@@ -5210,7 +5218,7 @@
                 </a:solidFill>
                 <a:latin typeface="Courier"/>
               </a:rPr>
-              <a:t>"Conclusion: leaf weight differs between sides.</a:t>
+              <a:t>"Conclusion: mean leaf mass differs between sides.</a:t>
             </a:r>
             <a:r>
               <a:rPr>
@@ -5502,7 +5510,7 @@
                 </a:solidFill>
                 <a:latin typeface="Courier"/>
               </a:rPr>
-              <a:t>"Conclusion: insufficient evidence of a difference.</a:t>
+              <a:t>"Conclusion: no evidence that mean leaf mass differs between sides.</a:t>
             </a:r>
             <a:r>
               <a:rPr>
@@ -5550,9 +5558,9 @@
               <a:rPr>
                 <a:latin typeface="Courier"/>
               </a:rPr>
-              <a:t>p = 2.51e-08 &lt; α = 0.05 
-Decision: REJECT H₀
-Conclusion: leaf weight differs between sides.</a:t>
+              <a:t>p = 0.724 &gt;= α = 0.05 
+Decision: FAIL TO REJECT H₀
+Conclusion: no evidence that mean leaf mass differs between sides.</a:t>
             </a:r>
           </a:p>
         </p:txBody>
@@ -5586,7 +5594,7 @@
             </a:pPr>
             <a:r>
               <a:rPr sz="2000" b="1"/>
-              <a:t>What a small p-value means:</a:t>
+              <a:t>What the p-value means:</a:t>
             </a:r>
           </a:p>
           <a:p>
@@ -5595,7 +5603,7 @@
             </a:pPr>
             <a:r>
               <a:rPr sz="2000"/>
-              <a:t>If H₀ were true (no real difference), we would get a t-statistic this large or larger less than </a:t>
+              <a:t>If H₀ were true (no real difference), we would get a t-statistic at least this large </a:t>
             </a:r>
             <a:r>
               <a:rPr sz="2000">
@@ -5630,7 +5638,7 @@
             </a:r>
             <a:r>
               <a:rPr sz="2000"/>
-              <a:t> &lt; α, we reject H₀.</a:t>
+              <a:t> &lt; α, we reject H₀; otherwise we fail to reject it.</a:t>
             </a:r>
           </a:p>
           <a:p>
@@ -5639,28 +5647,36 @@
             </a:pPr>
             <a:r>
               <a:rPr b="1"/>
-              <a:t>What a small p-value does NOT mean:</a:t>
+              <a:t>What “fail to reject” does NOT mean:</a:t>
             </a:r>
           </a:p>
           <a:p>
             <a:pPr lvl="0"/>
             <a:r>
               <a:rPr/>
-              <a:t>It is not the probability that H₀ is true</a:t>
+              <a:t>It is </a:t>
+            </a:r>
+            <a:r>
+              <a:rPr b="1"/>
+              <a:t>not</a:t>
+            </a:r>
+            <a:r>
+              <a:rPr/>
+              <a:t> proof that H₀ is true</a:t>
             </a:r>
           </a:p>
           <a:p>
             <a:pPr lvl="0"/>
             <a:r>
               <a:rPr/>
-              <a:t>Statistical significance ≠ biological importance</a:t>
+              <a:t>It means this sample did not provide enough evidence of a difference</a:t>
             </a:r>
           </a:p>
           <a:p>
             <a:pPr lvl="0"/>
             <a:r>
               <a:rPr/>
-              <a:t>Report the effect size (difference in means) alongside </a:t>
+              <a:t>Report the effect size (difference in means) and CI alongside </a:t>
             </a:r>
             <a:r>
               <a:rPr i="1"/>
@@ -5936,7 +5952,7 @@
                 </a:solidFill>
                 <a:latin typeface="Courier"/>
               </a:rPr>
-              <a:t>leaf_box_10_plot &lt;- tree_df </a:t>
+              <a:t>leaf_box_10_plot &lt;- leaf_df </a:t>
             </a:r>
             <a:r>
               <a:rPr>
@@ -6009,7 +6025,7 @@
                 </a:solidFill>
                 <a:latin typeface="Courier"/>
               </a:rPr>
-              <a:t> side, </a:t>
+              <a:t> shade, </a:t>
             </a:r>
             <a:r>
               <a:rPr>
@@ -6027,7 +6043,7 @@
                 </a:solidFill>
                 <a:latin typeface="Courier"/>
               </a:rPr>
-              <a:t> weight_g, </a:t>
+              <a:t> mass_g, </a:t>
             </a:r>
             <a:r>
               <a:rPr>
@@ -6045,7 +6061,7 @@
                 </a:solidFill>
                 <a:latin typeface="Courier"/>
               </a:rPr>
-              <a:t> side)) </a:t>
+              <a:t> shade)) </a:t>
             </a:r>
             <a:r>
               <a:rPr>
@@ -6476,7 +6492,7 @@
                 </a:solidFill>
                 <a:latin typeface="Courier"/>
               </a:rPr>
-              <a:t>"Leaf Weight by Tree Side"</a:t>
+              <a:t>"Leaf Mass by Shade"</a:t>
             </a:r>
             <a:r>
               <a:rPr>
@@ -6762,7 +6778,7 @@
                 </a:solidFill>
                 <a:latin typeface="Courier"/>
               </a:rPr>
-              <a:t>"Side of Tree"</a:t>
+              <a:t>"Shade"</a:t>
             </a:r>
             <a:r>
               <a:rPr>
@@ -6808,7 +6824,7 @@
                 </a:solidFill>
                 <a:latin typeface="Courier"/>
               </a:rPr>
-              <a:t>"Leaf Weight (g)"</a:t>
+              <a:t>"Leaf Mass (g)"</a:t>
             </a:r>
             <a:br/>
             <a:r>
@@ -7123,7 +7139,7 @@
                 </a:solidFill>
                 <a:latin typeface="Courier"/>
               </a:rPr>
-              <a:t># Compute reporting values from the model object -------</a:t>
+              <a:t># Build the results sentence from the model object -----</a:t>
             </a:r>
             <a:br/>
             <a:r>
@@ -7133,7 +7149,7 @@
                 </a:solidFill>
                 <a:latin typeface="Courier"/>
               </a:rPr>
-              <a:t>t_val &lt;- </a:t>
+              <a:t>t_val  &lt;- </a:t>
             </a:r>
             <a:r>
               <a:rPr>
@@ -7322,6 +7338,279 @@
             <a:r>
               <a:rPr>
                 <a:solidFill>
+                  <a:srgbClr val="003B4F"/>
+                </a:solidFill>
+                <a:latin typeface="Courier"/>
+              </a:rPr>
+              <a:t>heavier &lt;- </a:t>
+            </a:r>
+            <a:r>
+              <a:rPr b="1">
+                <a:solidFill>
+                  <a:srgbClr val="003B4F"/>
+                </a:solidFill>
+                <a:latin typeface="Courier"/>
+              </a:rPr>
+              <a:t>if</a:t>
+            </a:r>
+            <a:r>
+              <a:rPr>
+                <a:solidFill>
+                  <a:srgbClr val="003B4F"/>
+                </a:solidFill>
+                <a:latin typeface="Courier"/>
+              </a:rPr>
+              <a:t> (leaf_ttest_model</a:t>
+            </a:r>
+            <a:r>
+              <a:rPr>
+                <a:solidFill>
+                  <a:srgbClr val="5E5E5E"/>
+                </a:solidFill>
+                <a:latin typeface="Courier"/>
+              </a:rPr>
+              <a:t>$</a:t>
+            </a:r>
+            <a:r>
+              <a:rPr>
+                <a:solidFill>
+                  <a:srgbClr val="003B4F"/>
+                </a:solidFill>
+                <a:latin typeface="Courier"/>
+              </a:rPr>
+              <a:t>estimate[</a:t>
+            </a:r>
+            <a:r>
+              <a:rPr>
+                <a:solidFill>
+                  <a:srgbClr val="AD0000"/>
+                </a:solidFill>
+                <a:latin typeface="Courier"/>
+              </a:rPr>
+              <a:t>1</a:t>
+            </a:r>
+            <a:r>
+              <a:rPr>
+                <a:solidFill>
+                  <a:srgbClr val="003B4F"/>
+                </a:solidFill>
+                <a:latin typeface="Courier"/>
+              </a:rPr>
+              <a:t>] </a:t>
+            </a:r>
+            <a:r>
+              <a:rPr>
+                <a:solidFill>
+                  <a:srgbClr val="5E5E5E"/>
+                </a:solidFill>
+                <a:latin typeface="Courier"/>
+              </a:rPr>
+              <a:t>&gt;</a:t>
+            </a:r>
+            <a:r>
+              <a:rPr>
+                <a:solidFill>
+                  <a:srgbClr val="003B4F"/>
+                </a:solidFill>
+                <a:latin typeface="Courier"/>
+              </a:rPr>
+              <a:t> leaf_ttest_model</a:t>
+            </a:r>
+            <a:r>
+              <a:rPr>
+                <a:solidFill>
+                  <a:srgbClr val="5E5E5E"/>
+                </a:solidFill>
+                <a:latin typeface="Courier"/>
+              </a:rPr>
+              <a:t>$</a:t>
+            </a:r>
+            <a:r>
+              <a:rPr>
+                <a:solidFill>
+                  <a:srgbClr val="003B4F"/>
+                </a:solidFill>
+                <a:latin typeface="Courier"/>
+              </a:rPr>
+              <a:t>estimate[</a:t>
+            </a:r>
+            <a:r>
+              <a:rPr>
+                <a:solidFill>
+                  <a:srgbClr val="AD0000"/>
+                </a:solidFill>
+                <a:latin typeface="Courier"/>
+              </a:rPr>
+              <a:t>2</a:t>
+            </a:r>
+            <a:r>
+              <a:rPr>
+                <a:solidFill>
+                  <a:srgbClr val="003B4F"/>
+                </a:solidFill>
+                <a:latin typeface="Courier"/>
+              </a:rPr>
+              <a:t>]) </a:t>
+            </a:r>
+            <a:r>
+              <a:rPr>
+                <a:solidFill>
+                  <a:srgbClr val="20794D"/>
+                </a:solidFill>
+                <a:latin typeface="Courier"/>
+              </a:rPr>
+              <a:t>"shady"</a:t>
+            </a:r>
+            <a:r>
+              <a:rPr>
+                <a:solidFill>
+                  <a:srgbClr val="003B4F"/>
+                </a:solidFill>
+                <a:latin typeface="Courier"/>
+              </a:rPr>
+              <a:t> </a:t>
+            </a:r>
+            <a:r>
+              <a:rPr b="1">
+                <a:solidFill>
+                  <a:srgbClr val="003B4F"/>
+                </a:solidFill>
+                <a:latin typeface="Courier"/>
+              </a:rPr>
+              <a:t>else</a:t>
+            </a:r>
+            <a:r>
+              <a:rPr>
+                <a:solidFill>
+                  <a:srgbClr val="003B4F"/>
+                </a:solidFill>
+                <a:latin typeface="Courier"/>
+              </a:rPr>
+              <a:t> </a:t>
+            </a:r>
+            <a:r>
+              <a:rPr>
+                <a:solidFill>
+                  <a:srgbClr val="20794D"/>
+                </a:solidFill>
+                <a:latin typeface="Courier"/>
+              </a:rPr>
+              <a:t>"sunny"</a:t>
+            </a:r>
+            <a:br/>
+            <a:r>
+              <a:rPr>
+                <a:solidFill>
+                  <a:srgbClr val="003B4F"/>
+                </a:solidFill>
+                <a:latin typeface="Courier"/>
+              </a:rPr>
+              <a:t>lighter &lt;- </a:t>
+            </a:r>
+            <a:r>
+              <a:rPr b="1">
+                <a:solidFill>
+                  <a:srgbClr val="003B4F"/>
+                </a:solidFill>
+                <a:latin typeface="Courier"/>
+              </a:rPr>
+              <a:t>if</a:t>
+            </a:r>
+            <a:r>
+              <a:rPr>
+                <a:solidFill>
+                  <a:srgbClr val="003B4F"/>
+                </a:solidFill>
+                <a:latin typeface="Courier"/>
+              </a:rPr>
+              <a:t> (heavier </a:t>
+            </a:r>
+            <a:r>
+              <a:rPr>
+                <a:solidFill>
+                  <a:srgbClr val="5E5E5E"/>
+                </a:solidFill>
+                <a:latin typeface="Courier"/>
+              </a:rPr>
+              <a:t>==</a:t>
+            </a:r>
+            <a:r>
+              <a:rPr>
+                <a:solidFill>
+                  <a:srgbClr val="003B4F"/>
+                </a:solidFill>
+                <a:latin typeface="Courier"/>
+              </a:rPr>
+              <a:t> </a:t>
+            </a:r>
+            <a:r>
+              <a:rPr>
+                <a:solidFill>
+                  <a:srgbClr val="20794D"/>
+                </a:solidFill>
+                <a:latin typeface="Courier"/>
+              </a:rPr>
+              <a:t>"shady"</a:t>
+            </a:r>
+            <a:r>
+              <a:rPr>
+                <a:solidFill>
+                  <a:srgbClr val="003B4F"/>
+                </a:solidFill>
+                <a:latin typeface="Courier"/>
+              </a:rPr>
+              <a:t>) </a:t>
+            </a:r>
+            <a:r>
+              <a:rPr>
+                <a:solidFill>
+                  <a:srgbClr val="20794D"/>
+                </a:solidFill>
+                <a:latin typeface="Courier"/>
+              </a:rPr>
+              <a:t>"sunny"</a:t>
+            </a:r>
+            <a:r>
+              <a:rPr>
+                <a:solidFill>
+                  <a:srgbClr val="003B4F"/>
+                </a:solidFill>
+                <a:latin typeface="Courier"/>
+              </a:rPr>
+              <a:t> </a:t>
+            </a:r>
+            <a:r>
+              <a:rPr b="1">
+                <a:solidFill>
+                  <a:srgbClr val="003B4F"/>
+                </a:solidFill>
+                <a:latin typeface="Courier"/>
+              </a:rPr>
+              <a:t>else</a:t>
+            </a:r>
+            <a:r>
+              <a:rPr>
+                <a:solidFill>
+                  <a:srgbClr val="003B4F"/>
+                </a:solidFill>
+                <a:latin typeface="Courier"/>
+              </a:rPr>
+              <a:t> </a:t>
+            </a:r>
+            <a:r>
+              <a:rPr>
+                <a:solidFill>
+                  <a:srgbClr val="20794D"/>
+                </a:solidFill>
+                <a:latin typeface="Courier"/>
+              </a:rPr>
+              <a:t>"shady"</a:t>
+            </a:r>
+            <a:br/>
+            <a:br/>
+            <a:r>
+              <a:rPr>
+                <a:solidFill>
                   <a:srgbClr val="4758AB"/>
                 </a:solidFill>
                 <a:latin typeface="Courier"/>
@@ -7390,6 +7679,88 @@
               <a:buNone/>
             </a:pPr>
             <a:r>
+              <a:rPr b="1">
+                <a:solidFill>
+                  <a:srgbClr val="003B4F"/>
+                </a:solidFill>
+                <a:latin typeface="Courier"/>
+              </a:rPr>
+              <a:t>if</a:t>
+            </a:r>
+            <a:r>
+              <a:rPr>
+                <a:solidFill>
+                  <a:srgbClr val="003B4F"/>
+                </a:solidFill>
+                <a:latin typeface="Courier"/>
+              </a:rPr>
+              <a:t> (leaf_ttest_model</a:t>
+            </a:r>
+            <a:r>
+              <a:rPr>
+                <a:solidFill>
+                  <a:srgbClr val="5E5E5E"/>
+                </a:solidFill>
+                <a:latin typeface="Courier"/>
+              </a:rPr>
+              <a:t>$</a:t>
+            </a:r>
+            <a:r>
+              <a:rPr>
+                <a:solidFill>
+                  <a:srgbClr val="003B4F"/>
+                </a:solidFill>
+                <a:latin typeface="Courier"/>
+              </a:rPr>
+              <a:t>p.value </a:t>
+            </a:r>
+            <a:r>
+              <a:rPr>
+                <a:solidFill>
+                  <a:srgbClr val="5E5E5E"/>
+                </a:solidFill>
+                <a:latin typeface="Courier"/>
+              </a:rPr>
+              <a:t>&lt;</a:t>
+            </a:r>
+            <a:r>
+              <a:rPr>
+                <a:solidFill>
+                  <a:srgbClr val="003B4F"/>
+                </a:solidFill>
+                <a:latin typeface="Courier"/>
+              </a:rPr>
+              <a:t> </a:t>
+            </a:r>
+            <a:r>
+              <a:rPr>
+                <a:solidFill>
+                  <a:srgbClr val="AD0000"/>
+                </a:solidFill>
+                <a:latin typeface="Courier"/>
+              </a:rPr>
+              <a:t>0.05</a:t>
+            </a:r>
+            <a:r>
+              <a:rPr>
+                <a:solidFill>
+                  <a:srgbClr val="003B4F"/>
+                </a:solidFill>
+                <a:latin typeface="Courier"/>
+              </a:rPr>
+              <a:t>) {</a:t>
+            </a:r>
+            <a:br/>
+            <a:r>
+              <a:rPr>
+                <a:solidFill>
+                  <a:srgbClr val="003B4F"/>
+                </a:solidFill>
+                <a:latin typeface="Courier"/>
+              </a:rPr>
+              <a:t>  </a:t>
+            </a:r>
+            <a:r>
               <a:rPr>
                 <a:solidFill>
                   <a:srgbClr val="4758AB"/>
@@ -7405,6 +7776,162 @@
                 </a:solidFill>
                 <a:latin typeface="Courier"/>
               </a:rPr>
+              <a:t>(heavier, </a:t>
+            </a:r>
+            <a:r>
+              <a:rPr>
+                <a:solidFill>
+                  <a:srgbClr val="20794D"/>
+                </a:solidFill>
+                <a:latin typeface="Courier"/>
+              </a:rPr>
+              <a:t>"-side leaves were significantly heavier than "</a:t>
+            </a:r>
+            <a:r>
+              <a:rPr>
+                <a:solidFill>
+                  <a:srgbClr val="003B4F"/>
+                </a:solidFill>
+                <a:latin typeface="Courier"/>
+              </a:rPr>
+              <a:t>,</a:t>
+            </a:r>
+            <a:br/>
+            <a:r>
+              <a:rPr>
+                <a:solidFill>
+                  <a:srgbClr val="003B4F"/>
+                </a:solidFill>
+                <a:latin typeface="Courier"/>
+              </a:rPr>
+              <a:t>      lighter, </a:t>
+            </a:r>
+            <a:r>
+              <a:rPr>
+                <a:solidFill>
+                  <a:srgbClr val="20794D"/>
+                </a:solidFill>
+                <a:latin typeface="Courier"/>
+              </a:rPr>
+              <a:t>"-side leaves</a:t>
+            </a:r>
+            <a:r>
+              <a:rPr>
+                <a:solidFill>
+                  <a:srgbClr val="5E5E5E"/>
+                </a:solidFill>
+                <a:latin typeface="Courier"/>
+              </a:rPr>
+              <a:t>\n</a:t>
+            </a:r>
+            <a:r>
+              <a:rPr>
+                <a:solidFill>
+                  <a:srgbClr val="20794D"/>
+                </a:solidFill>
+                <a:latin typeface="Courier"/>
+              </a:rPr>
+              <a:t>"</a:t>
+            </a:r>
+            <a:r>
+              <a:rPr>
+                <a:solidFill>
+                  <a:srgbClr val="003B4F"/>
+                </a:solidFill>
+                <a:latin typeface="Courier"/>
+              </a:rPr>
+              <a:t>, </a:t>
+            </a:r>
+            <a:r>
+              <a:rPr>
+                <a:solidFill>
+                  <a:srgbClr val="657422"/>
+                </a:solidFill>
+                <a:latin typeface="Courier"/>
+              </a:rPr>
+              <a:t>sep =</a:t>
+            </a:r>
+            <a:r>
+              <a:rPr>
+                <a:solidFill>
+                  <a:srgbClr val="003B4F"/>
+                </a:solidFill>
+                <a:latin typeface="Courier"/>
+              </a:rPr>
+              <a:t> </a:t>
+            </a:r>
+            <a:r>
+              <a:rPr>
+                <a:solidFill>
+                  <a:srgbClr val="20794D"/>
+                </a:solidFill>
+                <a:latin typeface="Courier"/>
+              </a:rPr>
+              <a:t>""</a:t>
+            </a:r>
+            <a:r>
+              <a:rPr>
+                <a:solidFill>
+                  <a:srgbClr val="003B4F"/>
+                </a:solidFill>
+                <a:latin typeface="Courier"/>
+              </a:rPr>
+              <a:t>)</a:t>
+            </a:r>
+            <a:br/>
+            <a:r>
+              <a:rPr>
+                <a:solidFill>
+                  <a:srgbClr val="003B4F"/>
+                </a:solidFill>
+                <a:latin typeface="Courier"/>
+              </a:rPr>
+              <a:t>} </a:t>
+            </a:r>
+            <a:r>
+              <a:rPr b="1">
+                <a:solidFill>
+                  <a:srgbClr val="003B4F"/>
+                </a:solidFill>
+                <a:latin typeface="Courier"/>
+              </a:rPr>
+              <a:t>else</a:t>
+            </a:r>
+            <a:r>
+              <a:rPr>
+                <a:solidFill>
+                  <a:srgbClr val="003B4F"/>
+                </a:solidFill>
+                <a:latin typeface="Courier"/>
+              </a:rPr>
+              <a:t> {</a:t>
+            </a:r>
+            <a:br/>
+            <a:r>
+              <a:rPr>
+                <a:solidFill>
+                  <a:srgbClr val="003B4F"/>
+                </a:solidFill>
+                <a:latin typeface="Courier"/>
+              </a:rPr>
+              <a:t>  </a:t>
+            </a:r>
+            <a:r>
+              <a:rPr>
+                <a:solidFill>
+                  <a:srgbClr val="4758AB"/>
+                </a:solidFill>
+                <a:latin typeface="Courier"/>
+              </a:rPr>
+              <a:t>cat</a:t>
+            </a:r>
+            <a:r>
+              <a:rPr>
+                <a:solidFill>
+                  <a:srgbClr val="003B4F"/>
+                </a:solidFill>
+                <a:latin typeface="Courier"/>
+              </a:rPr>
               <a:t>(</a:t>
             </a:r>
             <a:r>
@@ -7414,7 +7941,7 @@
                 </a:solidFill>
                 <a:latin typeface="Courier"/>
               </a:rPr>
-              <a:t>"Shady-side leaves were significantly heavier than</a:t>
+              <a:t>"Mean leaf mass did not differ significantly between sides</a:t>
             </a:r>
             <a:r>
               <a:rPr>
@@ -7443,6 +7970,16 @@
               </a:rPr>
               <a:t>)</a:t>
             </a:r>
+            <a:br/>
+            <a:r>
+              <a:rPr>
+                <a:solidFill>
+                  <a:srgbClr val="003B4F"/>
+                </a:solidFill>
+                <a:latin typeface="Courier"/>
+              </a:rPr>
+              <a:t>}</a:t>
+            </a:r>
           </a:p>
           <a:p>
             <a:pPr lvl="0" indent="0">
@@ -7452,7 +7989,7 @@
               <a:rPr>
                 <a:latin typeface="Courier"/>
               </a:rPr>
-              <a:t>Shady-side leaves were significantly heavier than</a:t>
+              <a:t>Mean leaf mass did not differ significantly between sides</a:t>
             </a:r>
           </a:p>
           <a:p>
@@ -7477,6 +8014,166 @@
               </a:rPr>
               <a:t>(</a:t>
             </a:r>
+            <a:r>
+              <a:rPr>
+                <a:solidFill>
+                  <a:srgbClr val="20794D"/>
+                </a:solidFill>
+                <a:latin typeface="Courier"/>
+              </a:rPr>
+              <a:t>"(Welch's t-test: t("</a:t>
+            </a:r>
+            <a:r>
+              <a:rPr>
+                <a:solidFill>
+                  <a:srgbClr val="003B4F"/>
+                </a:solidFill>
+                <a:latin typeface="Courier"/>
+              </a:rPr>
+              <a:t>, df_val, </a:t>
+            </a:r>
+            <a:r>
+              <a:rPr>
+                <a:solidFill>
+                  <a:srgbClr val="20794D"/>
+                </a:solidFill>
+                <a:latin typeface="Courier"/>
+              </a:rPr>
+              <a:t>") = "</a:t>
+            </a:r>
+            <a:r>
+              <a:rPr>
+                <a:solidFill>
+                  <a:srgbClr val="003B4F"/>
+                </a:solidFill>
+                <a:latin typeface="Courier"/>
+              </a:rPr>
+              <a:t>, t_val, </a:t>
+            </a:r>
+            <a:r>
+              <a:rPr>
+                <a:solidFill>
+                  <a:srgbClr val="20794D"/>
+                </a:solidFill>
+                <a:latin typeface="Courier"/>
+              </a:rPr>
+              <a:t>", p = "</a:t>
+            </a:r>
+            <a:r>
+              <a:rPr>
+                <a:solidFill>
+                  <a:srgbClr val="003B4F"/>
+                </a:solidFill>
+                <a:latin typeface="Courier"/>
+              </a:rPr>
+              <a:t>, p_val2, </a:t>
+            </a:r>
+            <a:r>
+              <a:rPr>
+                <a:solidFill>
+                  <a:srgbClr val="20794D"/>
+                </a:solidFill>
+                <a:latin typeface="Courier"/>
+              </a:rPr>
+              <a:t>").</a:t>
+            </a:r>
+            <a:r>
+              <a:rPr>
+                <a:solidFill>
+                  <a:srgbClr val="5E5E5E"/>
+                </a:solidFill>
+                <a:latin typeface="Courier"/>
+              </a:rPr>
+              <a:t>\n</a:t>
+            </a:r>
+            <a:r>
+              <a:rPr>
+                <a:solidFill>
+                  <a:srgbClr val="20794D"/>
+                </a:solidFill>
+                <a:latin typeface="Courier"/>
+              </a:rPr>
+              <a:t>"</a:t>
+            </a:r>
+            <a:r>
+              <a:rPr>
+                <a:solidFill>
+                  <a:srgbClr val="003B4F"/>
+                </a:solidFill>
+                <a:latin typeface="Courier"/>
+              </a:rPr>
+              <a:t>, </a:t>
+            </a:r>
+            <a:r>
+              <a:rPr>
+                <a:solidFill>
+                  <a:srgbClr val="657422"/>
+                </a:solidFill>
+                <a:latin typeface="Courier"/>
+              </a:rPr>
+              <a:t>sep =</a:t>
+            </a:r>
+            <a:r>
+              <a:rPr>
+                <a:solidFill>
+                  <a:srgbClr val="003B4F"/>
+                </a:solidFill>
+                <a:latin typeface="Courier"/>
+              </a:rPr>
+              <a:t> </a:t>
+            </a:r>
+            <a:r>
+              <a:rPr>
+                <a:solidFill>
+                  <a:srgbClr val="20794D"/>
+                </a:solidFill>
+                <a:latin typeface="Courier"/>
+              </a:rPr>
+              <a:t>""</a:t>
+            </a:r>
+            <a:r>
+              <a:rPr>
+                <a:solidFill>
+                  <a:srgbClr val="003B4F"/>
+                </a:solidFill>
+                <a:latin typeface="Courier"/>
+              </a:rPr>
+              <a:t>)</a:t>
+            </a:r>
+          </a:p>
+          <a:p>
+            <a:pPr lvl="0" indent="0">
+              <a:buNone/>
+            </a:pPr>
+            <a:r>
+              <a:rPr>
+                <a:latin typeface="Courier"/>
+              </a:rPr>
+              <a:t>(Welch's t-test: t(42.5) = 0.36, p = 0.72).</a:t>
+            </a:r>
+          </a:p>
+          <a:p>
+            <a:pPr lvl="0" indent="0">
+              <a:buNone/>
+            </a:pPr>
+            <a:r>
+              <a:rPr>
+                <a:solidFill>
+                  <a:srgbClr val="4758AB"/>
+                </a:solidFill>
+                <a:latin typeface="Courier"/>
+              </a:rPr>
+              <a:t>cat</a:t>
+            </a:r>
+            <a:r>
+              <a:rPr>
+                <a:solidFill>
+                  <a:srgbClr val="003B4F"/>
+                </a:solidFill>
+                <a:latin typeface="Courier"/>
+              </a:rPr>
+              <a:t>(</a:t>
+            </a:r>
             <a:br/>
             <a:r>
               <a:rPr>
@@ -7494,7 +8191,7 @@
                 </a:solidFill>
                 <a:latin typeface="Courier"/>
               </a:rPr>
-              <a:t>"sunny-side leaves (Welch's t-test: t("</a:t>
+              <a:t>"Mean ± SE: shady ="</a:t>
             </a:r>
             <a:r>
               <a:rPr>
@@ -7513,7 +8210,79 @@
                 </a:solidFill>
                 <a:latin typeface="Courier"/>
               </a:rPr>
-              <a:t>  df_val,</a:t>
+              <a:t>  </a:t>
+            </a:r>
+            <a:r>
+              <a:rPr>
+                <a:solidFill>
+                  <a:srgbClr val="4758AB"/>
+                </a:solidFill>
+                <a:latin typeface="Courier"/>
+              </a:rPr>
+              <a:t>round</a:t>
+            </a:r>
+            <a:r>
+              <a:rPr>
+                <a:solidFill>
+                  <a:srgbClr val="003B4F"/>
+                </a:solidFill>
+                <a:latin typeface="Courier"/>
+              </a:rPr>
+              <a:t>(leaf_ttest_model</a:t>
+            </a:r>
+            <a:r>
+              <a:rPr>
+                <a:solidFill>
+                  <a:srgbClr val="5E5E5E"/>
+                </a:solidFill>
+                <a:latin typeface="Courier"/>
+              </a:rPr>
+              <a:t>$</a:t>
+            </a:r>
+            <a:r>
+              <a:rPr>
+                <a:solidFill>
+                  <a:srgbClr val="003B4F"/>
+                </a:solidFill>
+                <a:latin typeface="Courier"/>
+              </a:rPr>
+              <a:t>estimate[</a:t>
+            </a:r>
+            <a:r>
+              <a:rPr>
+                <a:solidFill>
+                  <a:srgbClr val="AD0000"/>
+                </a:solidFill>
+                <a:latin typeface="Courier"/>
+              </a:rPr>
+              <a:t>1</a:t>
+            </a:r>
+            <a:r>
+              <a:rPr>
+                <a:solidFill>
+                  <a:srgbClr val="003B4F"/>
+                </a:solidFill>
+                <a:latin typeface="Courier"/>
+              </a:rPr>
+              <a:t>], </a:t>
+            </a:r>
+            <a:r>
+              <a:rPr>
+                <a:solidFill>
+                  <a:srgbClr val="AD0000"/>
+                </a:solidFill>
+                <a:latin typeface="Courier"/>
+              </a:rPr>
+              <a:t>3</a:t>
+            </a:r>
+            <a:r>
+              <a:rPr>
+                <a:solidFill>
+                  <a:srgbClr val="003B4F"/>
+                </a:solidFill>
+                <a:latin typeface="Courier"/>
+              </a:rPr>
+              <a:t>),</a:t>
             </a:r>
             <a:br/>
             <a:r>
@@ -7532,7 +8301,7 @@
                 </a:solidFill>
                 <a:latin typeface="Courier"/>
               </a:rPr>
-              <a:t>") ="</a:t>
+              <a:t>"±"</a:t>
             </a:r>
             <a:r>
               <a:rPr>
@@ -7551,7 +8320,115 @@
                 </a:solidFill>
                 <a:latin typeface="Courier"/>
               </a:rPr>
-              <a:t>  t_val,</a:t>
+              <a:t>  </a:t>
+            </a:r>
+            <a:r>
+              <a:rPr>
+                <a:solidFill>
+                  <a:srgbClr val="4758AB"/>
+                </a:solidFill>
+                <a:latin typeface="Courier"/>
+              </a:rPr>
+              <a:t>round</a:t>
+            </a:r>
+            <a:r>
+              <a:rPr>
+                <a:solidFill>
+                  <a:srgbClr val="003B4F"/>
+                </a:solidFill>
+                <a:latin typeface="Courier"/>
+              </a:rPr>
+              <a:t>(recap_df</a:t>
+            </a:r>
+            <a:r>
+              <a:rPr>
+                <a:solidFill>
+                  <a:srgbClr val="5E5E5E"/>
+                </a:solidFill>
+                <a:latin typeface="Courier"/>
+              </a:rPr>
+              <a:t>$</a:t>
+            </a:r>
+            <a:r>
+              <a:rPr>
+                <a:solidFill>
+                  <a:srgbClr val="003B4F"/>
+                </a:solidFill>
+                <a:latin typeface="Courier"/>
+              </a:rPr>
+              <a:t>se_mass[recap_df</a:t>
+            </a:r>
+            <a:r>
+              <a:rPr>
+                <a:solidFill>
+                  <a:srgbClr val="5E5E5E"/>
+                </a:solidFill>
+                <a:latin typeface="Courier"/>
+              </a:rPr>
+              <a:t>$</a:t>
+            </a:r>
+            <a:r>
+              <a:rPr>
+                <a:solidFill>
+                  <a:srgbClr val="003B4F"/>
+                </a:solidFill>
+                <a:latin typeface="Courier"/>
+              </a:rPr>
+              <a:t>shade </a:t>
+            </a:r>
+            <a:r>
+              <a:rPr>
+                <a:solidFill>
+                  <a:srgbClr val="5E5E5E"/>
+                </a:solidFill>
+                <a:latin typeface="Courier"/>
+              </a:rPr>
+              <a:t>==</a:t>
+            </a:r>
+            <a:r>
+              <a:rPr>
+                <a:solidFill>
+                  <a:srgbClr val="003B4F"/>
+                </a:solidFill>
+                <a:latin typeface="Courier"/>
+              </a:rPr>
+              <a:t> </a:t>
+            </a:r>
+            <a:r>
+              <a:rPr>
+                <a:solidFill>
+                  <a:srgbClr val="20794D"/>
+                </a:solidFill>
+                <a:latin typeface="Courier"/>
+              </a:rPr>
+              <a:t>"shady"</a:t>
+            </a:r>
+            <a:r>
+              <a:rPr>
+                <a:solidFill>
+                  <a:srgbClr val="003B4F"/>
+                </a:solidFill>
+                <a:latin typeface="Courier"/>
+              </a:rPr>
+              <a:t>], </a:t>
+            </a:r>
+            <a:r>
+              <a:rPr>
+                <a:solidFill>
+                  <a:srgbClr val="AD0000"/>
+                </a:solidFill>
+                <a:latin typeface="Courier"/>
+              </a:rPr>
+              <a:t>3</a:t>
+            </a:r>
+            <a:r>
+              <a:rPr>
+                <a:solidFill>
+                  <a:srgbClr val="003B4F"/>
+                </a:solidFill>
+                <a:latin typeface="Courier"/>
+              </a:rPr>
+              <a:t>),</a:t>
             </a:r>
             <a:br/>
             <a:r>
@@ -7570,7 +8447,7 @@
                 </a:solidFill>
                 <a:latin typeface="Courier"/>
               </a:rPr>
-              <a:t>", p ="</a:t>
+              <a:t>"g,  sunny ="</a:t>
             </a:r>
             <a:r>
               <a:rPr>
@@ -7589,7 +8466,79 @@
                 </a:solidFill>
                 <a:latin typeface="Courier"/>
               </a:rPr>
-              <a:t>  p_val2,</a:t>
+              <a:t>  </a:t>
+            </a:r>
+            <a:r>
+              <a:rPr>
+                <a:solidFill>
+                  <a:srgbClr val="4758AB"/>
+                </a:solidFill>
+                <a:latin typeface="Courier"/>
+              </a:rPr>
+              <a:t>round</a:t>
+            </a:r>
+            <a:r>
+              <a:rPr>
+                <a:solidFill>
+                  <a:srgbClr val="003B4F"/>
+                </a:solidFill>
+                <a:latin typeface="Courier"/>
+              </a:rPr>
+              <a:t>(leaf_ttest_model</a:t>
+            </a:r>
+            <a:r>
+              <a:rPr>
+                <a:solidFill>
+                  <a:srgbClr val="5E5E5E"/>
+                </a:solidFill>
+                <a:latin typeface="Courier"/>
+              </a:rPr>
+              <a:t>$</a:t>
+            </a:r>
+            <a:r>
+              <a:rPr>
+                <a:solidFill>
+                  <a:srgbClr val="003B4F"/>
+                </a:solidFill>
+                <a:latin typeface="Courier"/>
+              </a:rPr>
+              <a:t>estimate[</a:t>
+            </a:r>
+            <a:r>
+              <a:rPr>
+                <a:solidFill>
+                  <a:srgbClr val="AD0000"/>
+                </a:solidFill>
+                <a:latin typeface="Courier"/>
+              </a:rPr>
+              <a:t>2</a:t>
+            </a:r>
+            <a:r>
+              <a:rPr>
+                <a:solidFill>
+                  <a:srgbClr val="003B4F"/>
+                </a:solidFill>
+                <a:latin typeface="Courier"/>
+              </a:rPr>
+              <a:t>], </a:t>
+            </a:r>
+            <a:r>
+              <a:rPr>
+                <a:solidFill>
+                  <a:srgbClr val="AD0000"/>
+                </a:solidFill>
+                <a:latin typeface="Courier"/>
+              </a:rPr>
+              <a:t>3</a:t>
+            </a:r>
+            <a:r>
+              <a:rPr>
+                <a:solidFill>
+                  <a:srgbClr val="003B4F"/>
+                </a:solidFill>
+                <a:latin typeface="Courier"/>
+              </a:rPr>
+              <a:t>),</a:t>
             </a:r>
             <a:br/>
             <a:r>
@@ -7608,7 +8557,44 @@
                 </a:solidFill>
                 <a:latin typeface="Courier"/>
               </a:rPr>
-              <a:t>").</a:t>
+              <a:t>"±"</a:t>
+            </a:r>
+            <a:r>
+              <a:rPr>
+                <a:solidFill>
+                  <a:srgbClr val="003B4F"/>
+                </a:solidFill>
+                <a:latin typeface="Courier"/>
+              </a:rPr>
+              <a:t>,</a:t>
+            </a:r>
+            <a:br/>
+            <a:r>
+              <a:rPr>
+                <a:solidFill>
+                  <a:srgbClr val="003B4F"/>
+                </a:solidFill>
+                <a:latin typeface="Courier"/>
+              </a:rPr>
+              <a:t>  </a:t>
+            </a:r>
+            <a:r>
+              <a:rPr>
+                <a:solidFill>
+                  <a:srgbClr val="4758AB"/>
+                </a:solidFill>
+                <a:latin typeface="Courier"/>
+              </a:rPr>
+              <a:t>round</a:t>
+            </a:r>
+            <a:r>
+              <a:rPr>
+                <a:solidFill>
+                  <a:srgbClr val="003B4F"/>
+                </a:solidFill>
+                <a:latin typeface="Courier"/>
+              </a:rPr>
+              <a:t>(recap_df</a:t>
             </a:r>
             <a:r>
               <a:rPr>
@@ -7617,6 +8603,115 @@
                 </a:solidFill>
                 <a:latin typeface="Courier"/>
               </a:rPr>
+              <a:t>$</a:t>
+            </a:r>
+            <a:r>
+              <a:rPr>
+                <a:solidFill>
+                  <a:srgbClr val="003B4F"/>
+                </a:solidFill>
+                <a:latin typeface="Courier"/>
+              </a:rPr>
+              <a:t>se_mass[recap_df</a:t>
+            </a:r>
+            <a:r>
+              <a:rPr>
+                <a:solidFill>
+                  <a:srgbClr val="5E5E5E"/>
+                </a:solidFill>
+                <a:latin typeface="Courier"/>
+              </a:rPr>
+              <a:t>$</a:t>
+            </a:r>
+            <a:r>
+              <a:rPr>
+                <a:solidFill>
+                  <a:srgbClr val="003B4F"/>
+                </a:solidFill>
+                <a:latin typeface="Courier"/>
+              </a:rPr>
+              <a:t>shade </a:t>
+            </a:r>
+            <a:r>
+              <a:rPr>
+                <a:solidFill>
+                  <a:srgbClr val="5E5E5E"/>
+                </a:solidFill>
+                <a:latin typeface="Courier"/>
+              </a:rPr>
+              <a:t>==</a:t>
+            </a:r>
+            <a:r>
+              <a:rPr>
+                <a:solidFill>
+                  <a:srgbClr val="003B4F"/>
+                </a:solidFill>
+                <a:latin typeface="Courier"/>
+              </a:rPr>
+              <a:t> </a:t>
+            </a:r>
+            <a:r>
+              <a:rPr>
+                <a:solidFill>
+                  <a:srgbClr val="20794D"/>
+                </a:solidFill>
+                <a:latin typeface="Courier"/>
+              </a:rPr>
+              <a:t>"sunny"</a:t>
+            </a:r>
+            <a:r>
+              <a:rPr>
+                <a:solidFill>
+                  <a:srgbClr val="003B4F"/>
+                </a:solidFill>
+                <a:latin typeface="Courier"/>
+              </a:rPr>
+              <a:t>], </a:t>
+            </a:r>
+            <a:r>
+              <a:rPr>
+                <a:solidFill>
+                  <a:srgbClr val="AD0000"/>
+                </a:solidFill>
+                <a:latin typeface="Courier"/>
+              </a:rPr>
+              <a:t>3</a:t>
+            </a:r>
+            <a:r>
+              <a:rPr>
+                <a:solidFill>
+                  <a:srgbClr val="003B4F"/>
+                </a:solidFill>
+                <a:latin typeface="Courier"/>
+              </a:rPr>
+              <a:t>),</a:t>
+            </a:r>
+            <a:br/>
+            <a:r>
+              <a:rPr>
+                <a:solidFill>
+                  <a:srgbClr val="003B4F"/>
+                </a:solidFill>
+                <a:latin typeface="Courier"/>
+              </a:rPr>
+              <a:t>  </a:t>
+            </a:r>
+            <a:r>
+              <a:rPr>
+                <a:solidFill>
+                  <a:srgbClr val="20794D"/>
+                </a:solidFill>
+                <a:latin typeface="Courier"/>
+              </a:rPr>
+              <a:t>"g.</a:t>
+            </a:r>
+            <a:r>
+              <a:rPr>
+                <a:solidFill>
+                  <a:srgbClr val="5E5E5E"/>
+                </a:solidFill>
+                <a:latin typeface="Courier"/>
+              </a:rPr>
               <a:t>\n</a:t>
             </a:r>
             <a:r>
@@ -7647,681 +8742,7 @@
               <a:rPr>
                 <a:latin typeface="Courier"/>
               </a:rPr>
-              <a:t>sunny-side leaves (Welch's t-test: t( 16.8 ) = 9.73 , p = 2.5e-08 ).</a:t>
-            </a:r>
-          </a:p>
-          <a:p>
-            <a:pPr lvl="0" indent="0">
-              <a:buNone/>
-            </a:pPr>
-            <a:r>
-              <a:rPr>
-                <a:solidFill>
-                  <a:srgbClr val="4758AB"/>
-                </a:solidFill>
-                <a:latin typeface="Courier"/>
-              </a:rPr>
-              <a:t>cat</a:t>
-            </a:r>
-            <a:r>
-              <a:rPr>
-                <a:solidFill>
-                  <a:srgbClr val="003B4F"/>
-                </a:solidFill>
-                <a:latin typeface="Courier"/>
-              </a:rPr>
-              <a:t>(</a:t>
-            </a:r>
-            <a:br/>
-            <a:r>
-              <a:rPr>
-                <a:solidFill>
-                  <a:srgbClr val="003B4F"/>
-                </a:solidFill>
-                <a:latin typeface="Courier"/>
-              </a:rPr>
-              <a:t>  </a:t>
-            </a:r>
-            <a:r>
-              <a:rPr>
-                <a:solidFill>
-                  <a:srgbClr val="20794D"/>
-                </a:solidFill>
-                <a:latin typeface="Courier"/>
-              </a:rPr>
-              <a:t>"Mean ± SE: shady ="</a:t>
-            </a:r>
-            <a:r>
-              <a:rPr>
-                <a:solidFill>
-                  <a:srgbClr val="003B4F"/>
-                </a:solidFill>
-                <a:latin typeface="Courier"/>
-              </a:rPr>
-              <a:t>,</a:t>
-            </a:r>
-            <a:br/>
-            <a:r>
-              <a:rPr>
-                <a:solidFill>
-                  <a:srgbClr val="003B4F"/>
-                </a:solidFill>
-                <a:latin typeface="Courier"/>
-              </a:rPr>
-              <a:t>  </a:t>
-            </a:r>
-            <a:r>
-              <a:rPr>
-                <a:solidFill>
-                  <a:srgbClr val="4758AB"/>
-                </a:solidFill>
-                <a:latin typeface="Courier"/>
-              </a:rPr>
-              <a:t>round</a:t>
-            </a:r>
-            <a:r>
-              <a:rPr>
-                <a:solidFill>
-                  <a:srgbClr val="003B4F"/>
-                </a:solidFill>
-                <a:latin typeface="Courier"/>
-              </a:rPr>
-              <a:t>(leaf_ttest_model</a:t>
-            </a:r>
-            <a:r>
-              <a:rPr>
-                <a:solidFill>
-                  <a:srgbClr val="5E5E5E"/>
-                </a:solidFill>
-                <a:latin typeface="Courier"/>
-              </a:rPr>
-              <a:t>$</a:t>
-            </a:r>
-            <a:r>
-              <a:rPr>
-                <a:solidFill>
-                  <a:srgbClr val="003B4F"/>
-                </a:solidFill>
-                <a:latin typeface="Courier"/>
-              </a:rPr>
-              <a:t>estimate[</a:t>
-            </a:r>
-            <a:r>
-              <a:rPr>
-                <a:solidFill>
-                  <a:srgbClr val="AD0000"/>
-                </a:solidFill>
-                <a:latin typeface="Courier"/>
-              </a:rPr>
-              <a:t>1</a:t>
-            </a:r>
-            <a:r>
-              <a:rPr>
-                <a:solidFill>
-                  <a:srgbClr val="003B4F"/>
-                </a:solidFill>
-                <a:latin typeface="Courier"/>
-              </a:rPr>
-              <a:t>], </a:t>
-            </a:r>
-            <a:r>
-              <a:rPr>
-                <a:solidFill>
-                  <a:srgbClr val="AD0000"/>
-                </a:solidFill>
-                <a:latin typeface="Courier"/>
-              </a:rPr>
-              <a:t>2</a:t>
-            </a:r>
-            <a:r>
-              <a:rPr>
-                <a:solidFill>
-                  <a:srgbClr val="003B4F"/>
-                </a:solidFill>
-                <a:latin typeface="Courier"/>
-              </a:rPr>
-              <a:t>),</a:t>
-            </a:r>
-            <a:br/>
-            <a:r>
-              <a:rPr>
-                <a:solidFill>
-                  <a:srgbClr val="003B4F"/>
-                </a:solidFill>
-                <a:latin typeface="Courier"/>
-              </a:rPr>
-              <a:t>  </a:t>
-            </a:r>
-            <a:r>
-              <a:rPr>
-                <a:solidFill>
-                  <a:srgbClr val="20794D"/>
-                </a:solidFill>
-                <a:latin typeface="Courier"/>
-              </a:rPr>
-              <a:t>"±"</a:t>
-            </a:r>
-            <a:r>
-              <a:rPr>
-                <a:solidFill>
-                  <a:srgbClr val="003B4F"/>
-                </a:solidFill>
-                <a:latin typeface="Courier"/>
-              </a:rPr>
-              <a:t>,</a:t>
-            </a:r>
-            <a:br/>
-            <a:r>
-              <a:rPr>
-                <a:solidFill>
-                  <a:srgbClr val="003B4F"/>
-                </a:solidFill>
-                <a:latin typeface="Courier"/>
-              </a:rPr>
-              <a:t>  </a:t>
-            </a:r>
-            <a:r>
-              <a:rPr>
-                <a:solidFill>
-                  <a:srgbClr val="4758AB"/>
-                </a:solidFill>
-                <a:latin typeface="Courier"/>
-              </a:rPr>
-              <a:t>round</a:t>
-            </a:r>
-            <a:r>
-              <a:rPr>
-                <a:solidFill>
-                  <a:srgbClr val="003B4F"/>
-                </a:solidFill>
-                <a:latin typeface="Courier"/>
-              </a:rPr>
-              <a:t>(recap_df</a:t>
-            </a:r>
-            <a:r>
-              <a:rPr>
-                <a:solidFill>
-                  <a:srgbClr val="5E5E5E"/>
-                </a:solidFill>
-                <a:latin typeface="Courier"/>
-              </a:rPr>
-              <a:t>$</a:t>
-            </a:r>
-            <a:r>
-              <a:rPr>
-                <a:solidFill>
-                  <a:srgbClr val="003B4F"/>
-                </a:solidFill>
-                <a:latin typeface="Courier"/>
-              </a:rPr>
-              <a:t>se_wt[recap_df</a:t>
-            </a:r>
-            <a:r>
-              <a:rPr>
-                <a:solidFill>
-                  <a:srgbClr val="5E5E5E"/>
-                </a:solidFill>
-                <a:latin typeface="Courier"/>
-              </a:rPr>
-              <a:t>$</a:t>
-            </a:r>
-            <a:r>
-              <a:rPr>
-                <a:solidFill>
-                  <a:srgbClr val="003B4F"/>
-                </a:solidFill>
-                <a:latin typeface="Courier"/>
-              </a:rPr>
-              <a:t>side </a:t>
-            </a:r>
-            <a:r>
-              <a:rPr>
-                <a:solidFill>
-                  <a:srgbClr val="5E5E5E"/>
-                </a:solidFill>
-                <a:latin typeface="Courier"/>
-              </a:rPr>
-              <a:t>==</a:t>
-            </a:r>
-            <a:r>
-              <a:rPr>
-                <a:solidFill>
-                  <a:srgbClr val="003B4F"/>
-                </a:solidFill>
-                <a:latin typeface="Courier"/>
-              </a:rPr>
-              <a:t> </a:t>
-            </a:r>
-            <a:r>
-              <a:rPr>
-                <a:solidFill>
-                  <a:srgbClr val="20794D"/>
-                </a:solidFill>
-                <a:latin typeface="Courier"/>
-              </a:rPr>
-              <a:t>"shady"</a:t>
-            </a:r>
-            <a:r>
-              <a:rPr>
-                <a:solidFill>
-                  <a:srgbClr val="003B4F"/>
-                </a:solidFill>
-                <a:latin typeface="Courier"/>
-              </a:rPr>
-              <a:t>], </a:t>
-            </a:r>
-            <a:r>
-              <a:rPr>
-                <a:solidFill>
-                  <a:srgbClr val="AD0000"/>
-                </a:solidFill>
-                <a:latin typeface="Courier"/>
-              </a:rPr>
-              <a:t>2</a:t>
-            </a:r>
-            <a:r>
-              <a:rPr>
-                <a:solidFill>
-                  <a:srgbClr val="003B4F"/>
-                </a:solidFill>
-                <a:latin typeface="Courier"/>
-              </a:rPr>
-              <a:t>),</a:t>
-            </a:r>
-            <a:br/>
-            <a:r>
-              <a:rPr>
-                <a:solidFill>
-                  <a:srgbClr val="003B4F"/>
-                </a:solidFill>
-                <a:latin typeface="Courier"/>
-              </a:rPr>
-              <a:t>  </a:t>
-            </a:r>
-            <a:r>
-              <a:rPr>
-                <a:solidFill>
-                  <a:srgbClr val="20794D"/>
-                </a:solidFill>
-                <a:latin typeface="Courier"/>
-              </a:rPr>
-              <a:t>"g,</a:t>
-            </a:r>
-            <a:r>
-              <a:rPr>
-                <a:solidFill>
-                  <a:srgbClr val="5E5E5E"/>
-                </a:solidFill>
-                <a:latin typeface="Courier"/>
-              </a:rPr>
-              <a:t>\n</a:t>
-            </a:r>
-            <a:r>
-              <a:rPr>
-                <a:solidFill>
-                  <a:srgbClr val="20794D"/>
-                </a:solidFill>
-                <a:latin typeface="Courier"/>
-              </a:rPr>
-              <a:t>"</a:t>
-            </a:r>
-            <a:br/>
-            <a:r>
-              <a:rPr>
-                <a:solidFill>
-                  <a:srgbClr val="003B4F"/>
-                </a:solidFill>
-                <a:latin typeface="Courier"/>
-              </a:rPr>
-              <a:t>)</a:t>
-            </a:r>
-          </a:p>
-          <a:p>
-            <a:pPr lvl="0" indent="0">
-              <a:buNone/>
-            </a:pPr>
-            <a:r>
-              <a:rPr>
-                <a:latin typeface="Courier"/>
-              </a:rPr>
-              <a:t>Mean ± SE: shady = 7.8 ± 0.33 g,</a:t>
-            </a:r>
-          </a:p>
-          <a:p>
-            <a:pPr lvl="0" indent="0">
-              <a:buNone/>
-            </a:pPr>
-            <a:r>
-              <a:rPr>
-                <a:solidFill>
-                  <a:srgbClr val="4758AB"/>
-                </a:solidFill>
-                <a:latin typeface="Courier"/>
-              </a:rPr>
-              <a:t>cat</a:t>
-            </a:r>
-            <a:r>
-              <a:rPr>
-                <a:solidFill>
-                  <a:srgbClr val="003B4F"/>
-                </a:solidFill>
-                <a:latin typeface="Courier"/>
-              </a:rPr>
-              <a:t>(</a:t>
-            </a:r>
-            <a:br/>
-            <a:r>
-              <a:rPr>
-                <a:solidFill>
-                  <a:srgbClr val="003B4F"/>
-                </a:solidFill>
-                <a:latin typeface="Courier"/>
-              </a:rPr>
-              <a:t>  </a:t>
-            </a:r>
-            <a:r>
-              <a:rPr>
-                <a:solidFill>
-                  <a:srgbClr val="20794D"/>
-                </a:solidFill>
-                <a:latin typeface="Courier"/>
-              </a:rPr>
-              <a:t>"           sunny ="</a:t>
-            </a:r>
-            <a:r>
-              <a:rPr>
-                <a:solidFill>
-                  <a:srgbClr val="003B4F"/>
-                </a:solidFill>
-                <a:latin typeface="Courier"/>
-              </a:rPr>
-              <a:t>,</a:t>
-            </a:r>
-            <a:br/>
-            <a:r>
-              <a:rPr>
-                <a:solidFill>
-                  <a:srgbClr val="003B4F"/>
-                </a:solidFill>
-                <a:latin typeface="Courier"/>
-              </a:rPr>
-              <a:t>  </a:t>
-            </a:r>
-            <a:r>
-              <a:rPr>
-                <a:solidFill>
-                  <a:srgbClr val="4758AB"/>
-                </a:solidFill>
-                <a:latin typeface="Courier"/>
-              </a:rPr>
-              <a:t>round</a:t>
-            </a:r>
-            <a:r>
-              <a:rPr>
-                <a:solidFill>
-                  <a:srgbClr val="003B4F"/>
-                </a:solidFill>
-                <a:latin typeface="Courier"/>
-              </a:rPr>
-              <a:t>(leaf_ttest_model</a:t>
-            </a:r>
-            <a:r>
-              <a:rPr>
-                <a:solidFill>
-                  <a:srgbClr val="5E5E5E"/>
-                </a:solidFill>
-                <a:latin typeface="Courier"/>
-              </a:rPr>
-              <a:t>$</a:t>
-            </a:r>
-            <a:r>
-              <a:rPr>
-                <a:solidFill>
-                  <a:srgbClr val="003B4F"/>
-                </a:solidFill>
-                <a:latin typeface="Courier"/>
-              </a:rPr>
-              <a:t>estimate[</a:t>
-            </a:r>
-            <a:r>
-              <a:rPr>
-                <a:solidFill>
-                  <a:srgbClr val="AD0000"/>
-                </a:solidFill>
-                <a:latin typeface="Courier"/>
-              </a:rPr>
-              <a:t>2</a:t>
-            </a:r>
-            <a:r>
-              <a:rPr>
-                <a:solidFill>
-                  <a:srgbClr val="003B4F"/>
-                </a:solidFill>
-                <a:latin typeface="Courier"/>
-              </a:rPr>
-              <a:t>], </a:t>
-            </a:r>
-            <a:r>
-              <a:rPr>
-                <a:solidFill>
-                  <a:srgbClr val="AD0000"/>
-                </a:solidFill>
-                <a:latin typeface="Courier"/>
-              </a:rPr>
-              <a:t>2</a:t>
-            </a:r>
-            <a:r>
-              <a:rPr>
-                <a:solidFill>
-                  <a:srgbClr val="003B4F"/>
-                </a:solidFill>
-                <a:latin typeface="Courier"/>
-              </a:rPr>
-              <a:t>),</a:t>
-            </a:r>
-            <a:br/>
-            <a:r>
-              <a:rPr>
-                <a:solidFill>
-                  <a:srgbClr val="003B4F"/>
-                </a:solidFill>
-                <a:latin typeface="Courier"/>
-              </a:rPr>
-              <a:t>  </a:t>
-            </a:r>
-            <a:r>
-              <a:rPr>
-                <a:solidFill>
-                  <a:srgbClr val="20794D"/>
-                </a:solidFill>
-                <a:latin typeface="Courier"/>
-              </a:rPr>
-              <a:t>"±"</a:t>
-            </a:r>
-            <a:r>
-              <a:rPr>
-                <a:solidFill>
-                  <a:srgbClr val="003B4F"/>
-                </a:solidFill>
-                <a:latin typeface="Courier"/>
-              </a:rPr>
-              <a:t>,</a:t>
-            </a:r>
-            <a:br/>
-            <a:r>
-              <a:rPr>
-                <a:solidFill>
-                  <a:srgbClr val="003B4F"/>
-                </a:solidFill>
-                <a:latin typeface="Courier"/>
-              </a:rPr>
-              <a:t>  </a:t>
-            </a:r>
-            <a:r>
-              <a:rPr>
-                <a:solidFill>
-                  <a:srgbClr val="4758AB"/>
-                </a:solidFill>
-                <a:latin typeface="Courier"/>
-              </a:rPr>
-              <a:t>round</a:t>
-            </a:r>
-            <a:r>
-              <a:rPr>
-                <a:solidFill>
-                  <a:srgbClr val="003B4F"/>
-                </a:solidFill>
-                <a:latin typeface="Courier"/>
-              </a:rPr>
-              <a:t>(recap_df</a:t>
-            </a:r>
-            <a:r>
-              <a:rPr>
-                <a:solidFill>
-                  <a:srgbClr val="5E5E5E"/>
-                </a:solidFill>
-                <a:latin typeface="Courier"/>
-              </a:rPr>
-              <a:t>$</a:t>
-            </a:r>
-            <a:r>
-              <a:rPr>
-                <a:solidFill>
-                  <a:srgbClr val="003B4F"/>
-                </a:solidFill>
-                <a:latin typeface="Courier"/>
-              </a:rPr>
-              <a:t>se_wt[recap_df</a:t>
-            </a:r>
-            <a:r>
-              <a:rPr>
-                <a:solidFill>
-                  <a:srgbClr val="5E5E5E"/>
-                </a:solidFill>
-                <a:latin typeface="Courier"/>
-              </a:rPr>
-              <a:t>$</a:t>
-            </a:r>
-            <a:r>
-              <a:rPr>
-                <a:solidFill>
-                  <a:srgbClr val="003B4F"/>
-                </a:solidFill>
-                <a:latin typeface="Courier"/>
-              </a:rPr>
-              <a:t>side </a:t>
-            </a:r>
-            <a:r>
-              <a:rPr>
-                <a:solidFill>
-                  <a:srgbClr val="5E5E5E"/>
-                </a:solidFill>
-                <a:latin typeface="Courier"/>
-              </a:rPr>
-              <a:t>==</a:t>
-            </a:r>
-            <a:r>
-              <a:rPr>
-                <a:solidFill>
-                  <a:srgbClr val="003B4F"/>
-                </a:solidFill>
-                <a:latin typeface="Courier"/>
-              </a:rPr>
-              <a:t> </a:t>
-            </a:r>
-            <a:r>
-              <a:rPr>
-                <a:solidFill>
-                  <a:srgbClr val="20794D"/>
-                </a:solidFill>
-                <a:latin typeface="Courier"/>
-              </a:rPr>
-              <a:t>"sunny"</a:t>
-            </a:r>
-            <a:r>
-              <a:rPr>
-                <a:solidFill>
-                  <a:srgbClr val="003B4F"/>
-                </a:solidFill>
-                <a:latin typeface="Courier"/>
-              </a:rPr>
-              <a:t>], </a:t>
-            </a:r>
-            <a:r>
-              <a:rPr>
-                <a:solidFill>
-                  <a:srgbClr val="AD0000"/>
-                </a:solidFill>
-                <a:latin typeface="Courier"/>
-              </a:rPr>
-              <a:t>2</a:t>
-            </a:r>
-            <a:r>
-              <a:rPr>
-                <a:solidFill>
-                  <a:srgbClr val="003B4F"/>
-                </a:solidFill>
-                <a:latin typeface="Courier"/>
-              </a:rPr>
-              <a:t>),</a:t>
-            </a:r>
-            <a:br/>
-            <a:r>
-              <a:rPr>
-                <a:solidFill>
-                  <a:srgbClr val="003B4F"/>
-                </a:solidFill>
-                <a:latin typeface="Courier"/>
-              </a:rPr>
-              <a:t>  </a:t>
-            </a:r>
-            <a:r>
-              <a:rPr>
-                <a:solidFill>
-                  <a:srgbClr val="20794D"/>
-                </a:solidFill>
-                <a:latin typeface="Courier"/>
-              </a:rPr>
-              <a:t>"g.</a:t>
-            </a:r>
-            <a:r>
-              <a:rPr>
-                <a:solidFill>
-                  <a:srgbClr val="5E5E5E"/>
-                </a:solidFill>
-                <a:latin typeface="Courier"/>
-              </a:rPr>
-              <a:t>\n</a:t>
-            </a:r>
-            <a:r>
-              <a:rPr>
-                <a:solidFill>
-                  <a:srgbClr val="20794D"/>
-                </a:solidFill>
-                <a:latin typeface="Courier"/>
-              </a:rPr>
-              <a:t>"</a:t>
-            </a:r>
-            <a:br/>
-            <a:r>
-              <a:rPr>
-                <a:solidFill>
-                  <a:srgbClr val="003B4F"/>
-                </a:solidFill>
-                <a:latin typeface="Courier"/>
-              </a:rPr>
-              <a:t>)</a:t>
-            </a:r>
-          </a:p>
-          <a:p>
-            <a:pPr lvl="0" indent="0">
-              <a:buNone/>
-            </a:pPr>
-            <a:r>
-              <a:rPr>
-                <a:latin typeface="Courier"/>
-              </a:rPr>
-              <a:t>           sunny = 3.8 ± 0.25 g.</a:t>
+              <a:t>Mean ± SE: shady = 0.523 ± 0.028 g,  sunny = 0.505 ± 0.042 g.</a:t>
             </a:r>
           </a:p>
         </p:txBody>
@@ -8400,14 +8821,24 @@
             <a:pPr lvl="0"/>
             <a:r>
               <a:rPr/>
-              <a:t>Group means ± SE</a:t>
-            </a:r>
-          </a:p>
-          <a:p>
-            <a:pPr lvl="0"/>
+              <a:t>Group means ± SE with units</a:t>
+            </a:r>
+          </a:p>
+          <a:p>
+            <a:pPr lvl="0" indent="0" marL="0">
+              <a:buNone/>
+            </a:pPr>
             <a:r>
               <a:rPr/>
-              <a:t>Units</a:t>
+              <a:t>A </a:t>
+            </a:r>
+            <a:r>
+              <a:rPr b="1"/>
+              <a:t>non-significant</a:t>
+            </a:r>
+            <a:r>
+              <a:rPr/>
+              <a:t> result is still a result — report it plainly (“did not differ significantly”), never as “proved there is no difference.”</a:t>
             </a:r>
           </a:p>
           <a:p>
@@ -8540,7 +8971,7 @@
                 </a:solidFill>
                 <a:latin typeface="Courier"/>
               </a:rPr>
-              <a:t>"figures/leaf_weight_boxplot_ttest.png"</a:t>
+              <a:t>"figures/leaf_mass_boxplot_ttest.png"</a:t>
             </a:r>
             <a:r>
               <a:rPr>
@@ -9067,6 +9498,13 @@
             <a:r>
               <a:rPr/>
               <a:t>, means ± SE, units</a:t>
+            </a:r>
+          </a:p>
+          <a:p>
+            <a:pPr lvl="0"/>
+            <a:r>
+              <a:rPr/>
+              <a:t>A non-significant result is reported plainly — not as proof of “no difference”</a:t>
             </a:r>
           </a:p>
           <a:p>
@@ -9449,7 +9887,7 @@
                 </a:r>
                 <a:r>
                   <a:rPr/>
-                  <a:t> — histogram + Shapiro-Wilk, both sides roughly bell-shaped for n = 10</a:t>
+                  <a:t> — histogram + Shapiro-Wilk, roughly bell-shaped for ~25 per group</a:t>
                 </a:r>
               </a:p>
               <a:p>
@@ -9663,7 +10101,7 @@
             </a:pPr>
             <a:r>
               <a:rPr sz="2000"/>
-              <a:t>By the end you will have a complete, reportable t-test result and a publication-style figure to go with it.</a:t>
+              <a:t>By the end you will have a complete, reportable t-test result and a publication-style figure to go with it — whatever the test says.</a:t>
             </a:r>
           </a:p>
         </p:txBody>
@@ -9858,11 +10296,11 @@
             </a:r>
             <a:r>
               <a:rPr b="1"/>
-              <a:t>activity worksheet</a:t>
+              <a:t>activity</a:t>
             </a:r>
             <a:r>
               <a:rPr/>
-              <a:t> and type the code yourself.</a:t>
+              <a:t> and type the code yourself into your R script.</a:t>
             </a:r>
           </a:p>
           <a:p>
@@ -10120,6 +10558,34 @@
                 </a:solidFill>
                 <a:latin typeface="Courier"/>
               </a:rPr>
+              <a:t>(janitor) </a:t>
+            </a:r>
+            <a:r>
+              <a:rPr>
+                <a:solidFill>
+                  <a:srgbClr val="5E5E5E"/>
+                </a:solidFill>
+                <a:latin typeface="Courier"/>
+              </a:rPr>
+              <a:t># clean_names()</a:t>
+            </a:r>
+            <a:br/>
+            <a:r>
+              <a:rPr>
+                <a:solidFill>
+                  <a:srgbClr val="4758AB"/>
+                </a:solidFill>
+                <a:latin typeface="Courier"/>
+              </a:rPr>
+              <a:t>library</a:t>
+            </a:r>
+            <a:r>
+              <a:rPr>
+                <a:solidFill>
+                  <a:srgbClr val="003B4F"/>
+                </a:solidFill>
+                <a:latin typeface="Courier"/>
+              </a:rPr>
               <a:t>(car) </a:t>
             </a:r>
             <a:r>
@@ -10153,7 +10619,7 @@
                 </a:solidFill>
                 <a:latin typeface="Courier"/>
               </a:rPr>
-              <a:t>tree_df &lt;- </a:t>
+              <a:t>leaf_df &lt;- </a:t>
             </a:r>
             <a:r>
               <a:rPr>
@@ -10180,16 +10646,53 @@
                 </a:solidFill>
                 <a:latin typeface="Courier"/>
               </a:rPr>
-              <a:t>"data/2026_06_25_tree_experiment_raw_data.xlsx"</a:t>
-            </a:r>
-            <a:r>
-              <a:rPr>
-                <a:solidFill>
-                  <a:srgbClr val="003B4F"/>
-                </a:solidFill>
-                <a:latin typeface="Courier"/>
-              </a:rPr>
-              <a:t>)</a:t>
+              <a:t>"data/2026_09_03_data_sci_leaf_area.xlsx"</a:t>
+            </a:r>
+            <a:r>
+              <a:rPr>
+                <a:solidFill>
+                  <a:srgbClr val="003B4F"/>
+                </a:solidFill>
+                <a:latin typeface="Courier"/>
+              </a:rPr>
+              <a:t>) </a:t>
+            </a:r>
+            <a:r>
+              <a:rPr>
+                <a:solidFill>
+                  <a:srgbClr val="5E5E5E"/>
+                </a:solidFill>
+                <a:latin typeface="Courier"/>
+              </a:rPr>
+              <a:t>%&gt;%</a:t>
+            </a:r>
+            <a:br/>
+            <a:r>
+              <a:rPr>
+                <a:solidFill>
+                  <a:srgbClr val="003B4F"/>
+                </a:solidFill>
+                <a:latin typeface="Courier"/>
+              </a:rPr>
+              <a:t>  </a:t>
+            </a:r>
+            <a:r>
+              <a:rPr>
+                <a:solidFill>
+                  <a:srgbClr val="4758AB"/>
+                </a:solidFill>
+                <a:latin typeface="Courier"/>
+              </a:rPr>
+              <a:t>clean_names</a:t>
+            </a:r>
+            <a:r>
+              <a:rPr>
+                <a:solidFill>
+                  <a:srgbClr val="003B4F"/>
+                </a:solidFill>
+                <a:latin typeface="Courier"/>
+              </a:rPr>
+              <a:t>()</a:t>
             </a:r>
           </a:p>
         </p:txBody>
@@ -10284,7 +10787,7 @@
                 </a:solidFill>
                 <a:latin typeface="Courier"/>
               </a:rPr>
-              <a:t>recap_df &lt;- tree_df </a:t>
+              <a:t>recap_df &lt;- leaf_df </a:t>
             </a:r>
             <a:r>
               <a:rPr>
@@ -10321,7 +10824,7 @@
                 </a:solidFill>
                 <a:latin typeface="Courier"/>
               </a:rPr>
-              <a:t>(side) </a:t>
+              <a:t>(shade) </a:t>
             </a:r>
             <a:r>
               <a:rPr>
@@ -10431,7 +10934,7 @@
                 </a:solidFill>
                 <a:latin typeface="Courier"/>
               </a:rPr>
-              <a:t>(weight_g)),</a:t>
+              <a:t>(mass_g)),</a:t>
             </a:r>
             <a:br/>
             <a:r>
@@ -10450,7 +10953,7 @@
                 </a:solidFill>
                 <a:latin typeface="Courier"/>
               </a:rPr>
-              <a:t>mean_wt =</a:t>
+              <a:t>mean_mass =</a:t>
             </a:r>
             <a:r>
               <a:rPr>
@@ -10495,7 +10998,7 @@
                 </a:solidFill>
                 <a:latin typeface="Courier"/>
               </a:rPr>
-              <a:t>(weight_g, </a:t>
+              <a:t>(mass_g, </a:t>
             </a:r>
             <a:r>
               <a:rPr>
@@ -10540,7 +11043,7 @@
                 </a:solidFill>
                 <a:latin typeface="Courier"/>
               </a:rPr>
-              <a:t>2</a:t>
+              <a:t>3</a:t>
             </a:r>
             <a:r>
               <a:rPr>
@@ -10568,7 +11071,7 @@
                 </a:solidFill>
                 <a:latin typeface="Courier"/>
               </a:rPr>
-              <a:t>sd_wt =</a:t>
+              <a:t>sd_mass =</a:t>
             </a:r>
             <a:r>
               <a:rPr>
@@ -10613,7 +11116,7 @@
                 </a:solidFill>
                 <a:latin typeface="Courier"/>
               </a:rPr>
-              <a:t>(weight_g, </a:t>
+              <a:t>(mass_g, </a:t>
             </a:r>
             <a:r>
               <a:rPr>
@@ -10658,7 +11161,7 @@
                 </a:solidFill>
                 <a:latin typeface="Courier"/>
               </a:rPr>
-              <a:t>2</a:t>
+              <a:t>3</a:t>
             </a:r>
             <a:r>
               <a:rPr>
@@ -10686,7 +11189,7 @@
                 </a:solidFill>
                 <a:latin typeface="Courier"/>
               </a:rPr>
-              <a:t>se_wt =</a:t>
+              <a:t>se_mass =</a:t>
             </a:r>
             <a:r>
               <a:rPr>
@@ -10713,7 +11216,7 @@
                 </a:solidFill>
                 <a:latin typeface="Courier"/>
               </a:rPr>
-              <a:t>(sd_wt </a:t>
+              <a:t>(sd_mass </a:t>
             </a:r>
             <a:r>
               <a:rPr>
@@ -10758,7 +11261,7 @@
                 </a:solidFill>
                 <a:latin typeface="Courier"/>
               </a:rPr>
-              <a:t>2</a:t>
+              <a:t>3</a:t>
             </a:r>
             <a:r>
               <a:rPr>
@@ -10799,10 +11302,10 @@
                 <a:latin typeface="Courier"/>
               </a:rPr>
               <a:t># A tibble: 2 × 5
-  side      n mean_wt sd_wt se_wt
-  &lt;chr&gt; &lt;int&gt;   &lt;dbl&gt; &lt;dbl&gt; &lt;dbl&gt;
-1 shady    10     7.8  1.03  0.33
-2 sunny    10     3.8  0.79  0.25</a:t>
+  shade     n mean_mass sd_mass se_mass
+  &lt;chr&gt; &lt;int&gt;     &lt;dbl&gt;   &lt;dbl&gt;   &lt;dbl&gt;
+1 shady    28     0.523   0.148   0.028
+2 sunny    25     0.505   0.21    0.042</a:t>
             </a:r>
           </a:p>
           <a:p>
@@ -10825,7 +11328,7 @@
                 </a:solidFill>
                 <a:latin typeface="Courier"/>
               </a:rPr>
-              <a:t>(weight_g </a:t>
+              <a:t>(mass_g </a:t>
             </a:r>
             <a:r>
               <a:rPr>
@@ -10843,7 +11346,7 @@
                 </a:solidFill>
                 <a:latin typeface="Courier"/>
               </a:rPr>
-              <a:t> side, </a:t>
+              <a:t> shade, </a:t>
             </a:r>
             <a:r>
               <a:rPr>
@@ -10861,7 +11364,7 @@
                 </a:solidFill>
                 <a:latin typeface="Courier"/>
               </a:rPr>
-              <a:t> tree_df)</a:t>
+              <a:t> leaf_df)</a:t>
             </a:r>
           </a:p>
           <a:p>
@@ -10873,9 +11376,11 @@
                 <a:latin typeface="Courier"/>
               </a:rPr>
               <a:t>Levene's Test for Homogeneity of Variance (center = median)
-      Df F value Pr(&gt;F)
-group  1     0.6 0.4486
-      18               </a:t>
+      Df F value  Pr(&gt;F)  
+group  1  2.9667 0.09105 .
+      51                  
+---
+Signif. codes:  0 '***' 0.001 '**' 0.01 '*' 0.05 '.' 0.1 ' ' 1</a:t>
             </a:r>
           </a:p>
         </p:txBody>
@@ -10952,7 +11457,7 @@
             </a:pPr>
             <a:r>
               <a:rPr sz="2000"/>
-              <a:t>If your Worksheet 09 numbers don’t match exactly, that’s fine — small rounding differences don’t change the conclusion.</a:t>
+              <a:t>If your Activity 09 numbers don’t match exactly, that’s fine — small rounding differences don’t change the conclusion.</a:t>
             </a:r>
           </a:p>
         </p:txBody>
@@ -11254,7 +11759,7 @@
                 </a:solidFill>
                 <a:latin typeface="Courier"/>
               </a:rPr>
-              <a:t>  weight_g </a:t>
+              <a:t>  mass_g </a:t>
             </a:r>
             <a:r>
               <a:rPr>
@@ -11272,7 +11777,7 @@
                 </a:solidFill>
                 <a:latin typeface="Courier"/>
               </a:rPr>
-              <a:t> side, </a:t>
+              <a:t> shade, </a:t>
             </a:r>
             <a:r>
               <a:rPr>
@@ -11309,7 +11814,7 @@
                 </a:solidFill>
                 <a:latin typeface="Courier"/>
               </a:rPr>
-              <a:t> tree_df,</a:t>
+              <a:t> leaf_df,</a:t>
             </a:r>
             <a:br/>
             <a:r>
@@ -11453,14 +11958,14 @@
               </a:rPr>
               <a:t>
     Welch Two Sample t-test
-data:  weight_g by side
-t = 9.7333, df = 16.834, p-value = 2.514e-08
+data:  mass_g by shade
+t = 0.35579, df = 42.527, p-value = 0.7238
 alternative hypothesis: true difference in means between group shady and group sunny is not equal to 0
 95 percent confidence interval:
- 3.132297 4.867703
+ -0.08392774  0.11987117
 sample estimates:
 mean in group shady mean in group sunny 
-                7.8                 3.8 </a:t>
+          0.5230357           0.5050640 </a:t>
             </a:r>
           </a:p>
         </p:txBody>
@@ -11511,8 +12016,8 @@
                 <a:tableStyleId>{5C22544A-7EE6-4342-B048-85BDC9FD1C3A}</a:tableStyleId>
               </a:tblPr>
               <a:tblGrid>
-                <a:gridCol w="1587500"/>
-                <a:gridCol w="2451100"/>
+                <a:gridCol w="1536700"/>
+                <a:gridCol w="2501900"/>
               </a:tblGrid>
               <a:tr h="0">
                 <a:tc>
@@ -11561,7 +12066,7 @@
                         <a:rPr>
                           <a:latin typeface="Courier"/>
                         </a:rPr>
-                        <a:t>weight_g ~ side</a:t>
+                        <a:t>mass_g ~ shade</a:t>
                       </a:r>
                     </a:p>
                   </a:txBody>
@@ -11582,7 +12087,7 @@
                         <a:rPr>
                           <a:latin typeface="Courier"/>
                         </a:rPr>
-                        <a:t>weight_g</a:t>
+                        <a:t>mass_g</a:t>
                       </a:r>
                       <a:r>
                         <a:rPr/>
@@ -11592,7 +12097,7 @@
                         <a:rPr>
                           <a:latin typeface="Courier"/>
                         </a:rPr>
-                        <a:t>side</a:t>
+                        <a:t>shade</a:t>
                       </a:r>
                     </a:p>
                   </a:txBody>

--- a/docs/content/t_tests_2/t_tests_2_lecture.pptx
+++ b/docs/content/t_tests_2/t_tests_2_lecture.pptx
@@ -3358,7 +3358,7 @@
             </a:pPr>
             <a:r>
               <a:rPr/>
-              <a:t>2026-09-08</a:t>
+              <a:t>2026-09-10</a:t>
             </a:r>
           </a:p>
         </p:txBody>

--- a/docs/content/t_tests_2/t_tests_2_lecture.pptx
+++ b/docs/content/t_tests_2/t_tests_2_lecture.pptx
@@ -3358,7 +3358,7 @@
             </a:pPr>
             <a:r>
               <a:rPr/>
-              <a:t>2026-09-10</a:t>
+              <a:t>2026-09-14</a:t>
             </a:r>
           </a:p>
         </p:txBody>

--- a/docs/content/t_tests_2/t_tests_2_lecture.pptx
+++ b/docs/content/t_tests_2/t_tests_2_lecture.pptx
@@ -3358,7 +3358,7 @@
             </a:pPr>
             <a:r>
               <a:rPr/>
-              <a:t>2026-09-14</a:t>
+              <a:t>2026-09-21</a:t>
             </a:r>
           </a:p>
         </p:txBody>

--- a/docs/content/t_tests_2/t_tests_2_lecture.pptx
+++ b/docs/content/t_tests_2/t_tests_2_lecture.pptx
@@ -3358,7 +3358,7 @@
             </a:pPr>
             <a:r>
               <a:rPr/>
-              <a:t>2026-09-21</a:t>
+              <a:t>2026-09-22</a:t>
             </a:r>
           </a:p>
         </p:txBody>

--- a/docs/content/t_tests_2/t_tests_2_lecture.pptx
+++ b/docs/content/t_tests_2/t_tests_2_lecture.pptx
@@ -3358,7 +3358,7 @@
             </a:pPr>
             <a:r>
               <a:rPr/>
-              <a:t>2026-09-22</a:t>
+              <a:t>2026-09-23</a:t>
             </a:r>
           </a:p>
         </p:txBody>

--- a/docs/content/t_tests_2/t_tests_2_lecture.pptx
+++ b/docs/content/t_tests_2/t_tests_2_lecture.pptx
@@ -4286,7 +4286,17 @@
                 </a:solidFill>
                 <a:latin typeface="Courier"/>
               </a:rPr>
-              <a:t>), </a:t>
+              <a:t>),</a:t>
+            </a:r>
+            <a:br/>
+            <a:r>
+              <a:rPr>
+                <a:solidFill>
+                  <a:srgbClr val="003B4F"/>
+                </a:solidFill>
+                <a:latin typeface="Courier"/>
+              </a:rPr>
+              <a:t>    </a:t>
             </a:r>
             <a:r>
               <a:rPr>
@@ -4446,7 +4456,17 @@
                 </a:solidFill>
                 <a:latin typeface="Courier"/>
               </a:rPr>
-              <a:t>), </a:t>
+              <a:t>),</a:t>
+            </a:r>
+            <a:br/>
+            <a:r>
+              <a:rPr>
+                <a:solidFill>
+                  <a:srgbClr val="003B4F"/>
+                </a:solidFill>
+                <a:latin typeface="Courier"/>
+              </a:rPr>
+              <a:t>    </a:t>
             </a:r>
             <a:r>
               <a:rPr>
@@ -5510,7 +5530,35 @@
                 </a:solidFill>
                 <a:latin typeface="Courier"/>
               </a:rPr>
-              <a:t>"Conclusion: no evidence that mean leaf mass differs between sides.</a:t>
+              <a:t>"Conclusion: no evidence that mean leaf mass differs"</a:t>
+            </a:r>
+            <a:r>
+              <a:rPr>
+                <a:solidFill>
+                  <a:srgbClr val="003B4F"/>
+                </a:solidFill>
+                <a:latin typeface="Courier"/>
+              </a:rPr>
+              <a:t>,</a:t>
+            </a:r>
+            <a:br/>
+            <a:r>
+              <a:rPr>
+                <a:solidFill>
+                  <a:srgbClr val="003B4F"/>
+                </a:solidFill>
+                <a:latin typeface="Courier"/>
+              </a:rPr>
+              <a:t>      </a:t>
+            </a:r>
+            <a:r>
+              <a:rPr>
+                <a:solidFill>
+                  <a:srgbClr val="20794D"/>
+                </a:solidFill>
+                <a:latin typeface="Courier"/>
+              </a:rPr>
+              <a:t>"between sides.</a:t>
             </a:r>
             <a:r>
               <a:rPr>
@@ -7407,14 +7455,15 @@
               </a:rPr>
               <a:t>&gt;</a:t>
             </a:r>
-            <a:r>
-              <a:rPr>
-                <a:solidFill>
-                  <a:srgbClr val="003B4F"/>
-                </a:solidFill>
-                <a:latin typeface="Courier"/>
-              </a:rPr>
-              <a:t> leaf_ttest_model</a:t>
+            <a:br/>
+            <a:r>
+              <a:rPr>
+                <a:solidFill>
+                  <a:srgbClr val="003B4F"/>
+                </a:solidFill>
+                <a:latin typeface="Courier"/>
+              </a:rPr>
+              <a:t>               leaf_ttest_model</a:t>
             </a:r>
             <a:r>
               <a:rPr>
@@ -7941,7 +7990,35 @@
                 </a:solidFill>
                 <a:latin typeface="Courier"/>
               </a:rPr>
-              <a:t>"Mean leaf mass did not differ significantly between sides</a:t>
+              <a:t>"Mean leaf mass did not differ significantly"</a:t>
+            </a:r>
+            <a:r>
+              <a:rPr>
+                <a:solidFill>
+                  <a:srgbClr val="003B4F"/>
+                </a:solidFill>
+                <a:latin typeface="Courier"/>
+              </a:rPr>
+              <a:t>,</a:t>
+            </a:r>
+            <a:br/>
+            <a:r>
+              <a:rPr>
+                <a:solidFill>
+                  <a:srgbClr val="003B4F"/>
+                </a:solidFill>
+                <a:latin typeface="Courier"/>
+              </a:rPr>
+              <a:t>      </a:t>
+            </a:r>
+            <a:r>
+              <a:rPr>
+                <a:solidFill>
+                  <a:srgbClr val="20794D"/>
+                </a:solidFill>
+                <a:latin typeface="Courier"/>
+              </a:rPr>
+              <a:t>"between sides</a:t>
             </a:r>
             <a:r>
               <a:rPr>
@@ -8066,7 +8143,17 @@
                 </a:solidFill>
                 <a:latin typeface="Courier"/>
               </a:rPr>
-              <a:t>, p_val2, </a:t>
+              <a:t>,</a:t>
+            </a:r>
+            <a:br/>
+            <a:r>
+              <a:rPr>
+                <a:solidFill>
+                  <a:srgbClr val="003B4F"/>
+                </a:solidFill>
+                <a:latin typeface="Courier"/>
+              </a:rPr>
+              <a:t>    p_val2, </a:t>
             </a:r>
             <a:r>
               <a:rPr>
@@ -10619,7 +10706,17 @@
                 </a:solidFill>
                 <a:latin typeface="Courier"/>
               </a:rPr>
-              <a:t>leaf_df &lt;- </a:t>
+              <a:t>leaf_df &lt;-</a:t>
+            </a:r>
+            <a:br/>
+            <a:r>
+              <a:rPr>
+                <a:solidFill>
+                  <a:srgbClr val="003B4F"/>
+                </a:solidFill>
+                <a:latin typeface="Courier"/>
+              </a:rPr>
+              <a:t>  </a:t>
             </a:r>
             <a:r>
               <a:rPr>

--- a/docs/content/t_tests_2/t_tests_2_lecture.pptx
+++ b/docs/content/t_tests_2/t_tests_2_lecture.pptx
@@ -3358,7 +3358,7 @@
             </a:pPr>
             <a:r>
               <a:rPr/>
-              <a:t>2026-09-23</a:t>
+              <a:t>2026-09-24</a:t>
             </a:r>
           </a:p>
         </p:txBody>

--- a/docs/content/t_tests_2/t_tests_2_lecture.pptx
+++ b/docs/content/t_tests_2/t_tests_2_lecture.pptx
@@ -3379,7 +3379,7 @@
             </a:pPr>
             <a:r>
               <a:rPr/>
-              <a:t>2026-10-01</a:t>
+              <a:t>2026-10-05</a:t>
             </a:r>
           </a:p>
         </p:txBody>
@@ -9657,8 +9657,8 @@
         </p:blipFill>
         <p:spPr bwMode="auto">
           <a:xfrm>
-            <a:off x="4749800" y="1943100"/>
-            <a:ext cx="4038600" cy="1993900"/>
+            <a:off x="4749800" y="2095500"/>
+            <a:ext cx="4038600" cy="1676400"/>
           </a:xfrm>
           <a:prstGeom prst="rect">
             <a:avLst/>
@@ -11521,8 +11521,8 @@
         </p:blipFill>
         <p:spPr bwMode="auto">
           <a:xfrm>
-            <a:off x="127000" y="1892300"/>
-            <a:ext cx="4432300" cy="2044700"/>
+            <a:off x="127000" y="2032000"/>
+            <a:ext cx="4432300" cy="1778000"/>
           </a:xfrm>
           <a:prstGeom prst="rect">
             <a:avLst/>

--- a/docs/content/t_tests_2/t_tests_2_lecture.pptx
+++ b/docs/content/t_tests_2/t_tests_2_lecture.pptx
@@ -3379,7 +3379,7 @@
             </a:pPr>
             <a:r>
               <a:rPr/>
-              <a:t>2026-10-05</a:t>
+              <a:t>2026-10-08</a:t>
             </a:r>
           </a:p>
         </p:txBody>

--- a/docs/content/t_tests_2/t_tests_2_lecture.pptx
+++ b/docs/content/t_tests_2/t_tests_2_lecture.pptx
@@ -3379,7 +3379,7 @@
             </a:pPr>
             <a:r>
               <a:rPr/>
-              <a:t>2026-10-08</a:t>
+              <a:t>2026-10-09</a:t>
             </a:r>
           </a:p>
         </p:txBody>

--- a/docs/content/t_tests_2/t_tests_2_lecture.pptx
+++ b/docs/content/t_tests_2/t_tests_2_lecture.pptx
@@ -3379,7 +3379,7 @@
             </a:pPr>
             <a:r>
               <a:rPr/>
-              <a:t>2026-10-09</a:t>
+              <a:t>2026-10-19</a:t>
             </a:r>
           </a:p>
         </p:txBody>

--- a/docs/content/t_tests_2/t_tests_2_lecture.pptx
+++ b/docs/content/t_tests_2/t_tests_2_lecture.pptx
@@ -3379,7 +3379,7 @@
             </a:pPr>
             <a:r>
               <a:rPr/>
-              <a:t>2026-10-19</a:t>
+              <a:t>2026-10-22</a:t>
             </a:r>
           </a:p>
         </p:txBody>
